--- a/seminar/cai_tien/slides_5min_VN.pptx
+++ b/seminar/cai_tien/slides_5min_VN.pptx
@@ -3367,7 +3367,7 @@
         <p:spPr>
           <a:xfrm>
             <a:off x="0" y="0"/>
-            <a:ext cx="9144000" cy="886968"/>
+            <a:ext cx="9144000" cy="1188720"/>
           </a:xfrm>
           <a:prstGeom prst="rect">
             <a:avLst/>
@@ -3410,7 +3410,7 @@
         </p:nvSpPr>
         <p:spPr>
           <a:xfrm>
-            <a:off x="320040" y="182880"/>
+            <a:off x="320040" y="109728"/>
             <a:ext cx="8503920" cy="548640"/>
           </a:xfrm>
           <a:prstGeom prst="rect">
@@ -3444,8 +3444,8 @@
         </p:nvSpPr>
         <p:spPr>
           <a:xfrm>
-            <a:off x="365760" y="1024127"/>
-            <a:ext cx="5120640" cy="3291840"/>
+            <a:off x="338328" y="694944"/>
+            <a:ext cx="8412480" cy="411480"/>
           </a:xfrm>
           <a:prstGeom prst="rect">
             <a:avLst/>
@@ -3458,343 +3458,430 @@
           </a:bodyPr>
           <a:lstStyle/>
           <a:p>
-            <a:pPr>
-              <a:spcBef>
-                <a:spcPts val="0"/>
-              </a:spcBef>
-              <a:spcAft>
-                <a:spcPts val="1100"/>
-              </a:spcAft>
-            </a:pPr>
-            <a:r>
-              <a:rPr sz="1350" b="1" i="0">
+            <a:r>
+              <a:rPr sz="1150" b="0" i="1">
                 <a:solidFill>
-                  <a:srgbClr val="1A3A5C"/>
+                  <a:srgbClr val="B8CFE0"/>
                 </a:solidFill>
                 <a:latin typeface="Calibri"/>
               </a:rPr>
-              <a:t>▪  </a:t>
-            </a:r>
-            <a:r>
-              <a:rPr sz="1350" b="1" i="0">
-                <a:solidFill>
-                  <a:srgbClr val="1C2736"/>
-                </a:solidFill>
-                <a:latin typeface="Calibri"/>
-              </a:rPr>
-              <a:t>Backbone:</a:t>
-            </a:r>
-            <a:r>
-              <a:rPr sz="1350" b="0" i="0">
-                <a:solidFill>
-                  <a:srgbClr val="1C2736"/>
-                </a:solidFill>
-                <a:latin typeface="Calibri"/>
-              </a:rPr>
-              <a:t> Gemma 4 E4B (~8B) — nhỏ hơn MedRegA (~40B) 5×, chạy </a:t>
-            </a:r>
-            <a:r>
-              <a:rPr sz="1350" b="1" i="0">
-                <a:solidFill>
-                  <a:srgbClr val="1C2736"/>
-                </a:solidFill>
-                <a:latin typeface="Calibri"/>
-              </a:rPr>
-              <a:t>1 GPU</a:t>
-            </a:r>
-            <a:r>
-              <a:rPr sz="1350" b="0" i="0">
-                <a:solidFill>
-                  <a:srgbClr val="1C2736"/>
-                </a:solidFill>
-                <a:latin typeface="Calibri"/>
-              </a:rPr>
-              <a:t>; </a:t>
-            </a:r>
-            <a:r>
-              <a:rPr sz="1350" b="1" i="0">
-                <a:solidFill>
-                  <a:srgbClr val="1C2736"/>
-                </a:solidFill>
-                <a:latin typeface="Calibri"/>
-              </a:rPr>
-              <a:t>mở khoá vision tower</a:t>
-            </a:r>
-            <a:r>
-              <a:rPr sz="1350" b="0" i="0">
-                <a:solidFill>
-                  <a:srgbClr val="1C2736"/>
-                </a:solidFill>
-                <a:latin typeface="Calibri"/>
-              </a:rPr>
-              <a:t> để học đặc trưng y khoa.</a:t>
-            </a:r>
-          </a:p>
-          <a:p>
-            <a:pPr>
-              <a:spcBef>
-                <a:spcPts val="0"/>
-              </a:spcBef>
-              <a:spcAft>
-                <a:spcPts val="1100"/>
-              </a:spcAft>
-            </a:pPr>
-            <a:r>
-              <a:rPr sz="1350" b="1" i="0">
-                <a:solidFill>
-                  <a:srgbClr val="1A3A5C"/>
-                </a:solidFill>
-                <a:latin typeface="Calibri"/>
-              </a:rPr>
-              <a:t>▪  </a:t>
-            </a:r>
-            <a:r>
-              <a:rPr sz="1350" b="1" i="0">
-                <a:solidFill>
-                  <a:srgbClr val="1C2736"/>
-                </a:solidFill>
-                <a:latin typeface="Calibri"/>
-              </a:rPr>
-              <a:t>Dữ liệu:</a:t>
-            </a:r>
-            <a:r>
-              <a:rPr sz="1350" b="0" i="0">
-                <a:solidFill>
-                  <a:srgbClr val="1C2736"/>
-                </a:solidFill>
-                <a:latin typeface="Calibri"/>
-              </a:rPr>
-              <a:t> đa lát + </a:t>
-            </a:r>
-            <a:r>
-              <a:rPr sz="1350" b="1" i="0">
-                <a:solidFill>
-                  <a:srgbClr val="1C2736"/>
-                </a:solidFill>
-                <a:latin typeface="Calibri"/>
-              </a:rPr>
-              <a:t>ca âm</a:t>
-            </a:r>
-            <a:r>
-              <a:rPr sz="1350" b="0" i="0">
-                <a:solidFill>
-                  <a:srgbClr val="1C2736"/>
-                </a:solidFill>
-                <a:latin typeface="Calibri"/>
-              </a:rPr>
-              <a:t> (không u) + </a:t>
-            </a:r>
-            <a:r>
-              <a:rPr sz="1350" b="1" i="0">
-                <a:solidFill>
-                  <a:srgbClr val="1C2736"/>
-                </a:solidFill>
-                <a:latin typeface="Calibri"/>
-              </a:rPr>
-              <a:t>multi-box</a:t>
-            </a:r>
-            <a:r>
-              <a:rPr sz="1350" b="0" i="0">
-                <a:solidFill>
-                  <a:srgbClr val="1C2736"/>
-                </a:solidFill>
-                <a:latin typeface="Calibri"/>
-              </a:rPr>
-              <a:t> (tách từng ổ) — khác paper chỉ 1 lát; split theo bệnh nhân.</a:t>
-            </a:r>
-          </a:p>
-          <a:p>
-            <a:pPr>
-              <a:spcBef>
-                <a:spcPts val="0"/>
-              </a:spcBef>
-              <a:spcAft>
-                <a:spcPts val="1100"/>
-              </a:spcAft>
-            </a:pPr>
-            <a:r>
-              <a:rPr sz="1350" b="1" i="0">
-                <a:solidFill>
-                  <a:srgbClr val="1A3A5C"/>
-                </a:solidFill>
-                <a:latin typeface="Calibri"/>
-              </a:rPr>
-              <a:t>▪  </a:t>
-            </a:r>
-            <a:r>
-              <a:rPr sz="1350" b="1" i="0">
-                <a:solidFill>
-                  <a:srgbClr val="1C2736"/>
-                </a:solidFill>
-                <a:latin typeface="Calibri"/>
-              </a:rPr>
-              <a:t>Huấn luyện:</a:t>
-            </a:r>
-            <a:r>
-              <a:rPr sz="1350" b="0" i="0">
-                <a:solidFill>
-                  <a:srgbClr val="1C2736"/>
-                </a:solidFill>
-                <a:latin typeface="Calibri"/>
-              </a:rPr>
-              <a:t> LoRA (LLM) + full-finetune vision; box viết dưới dạng </a:t>
-            </a:r>
-            <a:r>
-              <a:rPr sz="1350" b="1" i="0">
-                <a:solidFill>
-                  <a:srgbClr val="1C2736"/>
-                </a:solidFill>
-                <a:latin typeface="Calibri"/>
-              </a:rPr>
-              <a:t>text toạ độ</a:t>
-            </a:r>
-            <a:r>
-              <a:rPr sz="1350" b="0" i="0">
-                <a:solidFill>
-                  <a:srgbClr val="1C2736"/>
-                </a:solidFill>
-                <a:latin typeface="Calibri"/>
-              </a:rPr>
-              <a:t> (0–1000).</a:t>
-            </a:r>
-          </a:p>
-          <a:p>
-            <a:pPr>
-              <a:spcBef>
-                <a:spcPts val="0"/>
-              </a:spcBef>
-              <a:spcAft>
-                <a:spcPts val="1100"/>
-              </a:spcAft>
-            </a:pPr>
-            <a:r>
-              <a:rPr sz="1350" b="1" i="0">
-                <a:solidFill>
-                  <a:srgbClr val="1A3A5C"/>
-                </a:solidFill>
-                <a:latin typeface="Calibri"/>
-              </a:rPr>
-              <a:t>▪  </a:t>
-            </a:r>
-            <a:r>
-              <a:rPr sz="1350" b="1" i="0">
-                <a:solidFill>
-                  <a:srgbClr val="1C2736"/>
-                </a:solidFill>
-                <a:latin typeface="Calibri"/>
-              </a:rPr>
-              <a:t>Đánh giá (đóng góp chính):</a:t>
-            </a:r>
-            <a:r>
-              <a:rPr sz="1350" b="0" i="0">
-                <a:solidFill>
-                  <a:srgbClr val="1C2736"/>
-                </a:solidFill>
-                <a:latin typeface="Calibri"/>
-              </a:rPr>
-              <a:t> per-patient + CI, </a:t>
-            </a:r>
-            <a:r>
-              <a:rPr sz="1350" b="1" i="0">
-                <a:solidFill>
-                  <a:srgbClr val="1C2736"/>
-                </a:solidFill>
-                <a:latin typeface="Calibri"/>
-              </a:rPr>
-              <a:t>tách detection/localization</a:t>
-            </a:r>
-            <a:r>
-              <a:rPr sz="1350" b="0" i="0">
-                <a:solidFill>
-                  <a:srgbClr val="1C2736"/>
-                </a:solidFill>
-                <a:latin typeface="Calibri"/>
-              </a:rPr>
-              <a:t>, </a:t>
-            </a:r>
-            <a:r>
-              <a:rPr sz="1350" b="1" i="0">
-                <a:solidFill>
-                  <a:srgbClr val="1C2736"/>
-                </a:solidFill>
-                <a:latin typeface="Calibri"/>
-              </a:rPr>
-              <a:t>selective prediction</a:t>
-            </a:r>
-            <a:r>
-              <a:rPr sz="1350" b="0" i="0">
-                <a:solidFill>
-                  <a:srgbClr val="1C2736"/>
-                </a:solidFill>
-                <a:latin typeface="Calibri"/>
-              </a:rPr>
-              <a:t> (biết khi nào không chắc).</a:t>
-            </a:r>
-          </a:p>
-        </p:txBody>
-      </p:sp>
-      <p:pic>
-        <p:nvPicPr>
-          <p:cNvPr id="5" name="Picture 4" descr="iou_frozen_vs_unfrozen.png"/>
-          <p:cNvPicPr>
-            <a:picLocks noChangeAspect="1"/>
-          </p:cNvPicPr>
+              <a:t>Mỗi lựa chọn vá đúng MỘT hạn chế của MedRegA</a:t>
+            </a:r>
+          </a:p>
+        </p:txBody>
+      </p:sp>
+      <p:graphicFrame>
+        <p:nvGraphicFramePr>
+          <p:cNvPr id="5" name="Table 4"/>
+          <p:cNvGraphicFramePr>
+            <a:graphicFrameLocks noGrp="1"/>
+          </p:cNvGraphicFramePr>
           <p:nvPr/>
-        </p:nvPicPr>
-        <p:blipFill>
-          <a:blip r:embed="rId2"/>
-          <a:stretch>
-            <a:fillRect/>
-          </a:stretch>
-        </p:blipFill>
-        <p:spPr>
-          <a:xfrm>
-            <a:off x="5669280" y="1161287"/>
-            <a:ext cx="3200400" cy="2556136"/>
-          </a:xfrm>
-          <a:prstGeom prst="rect">
-            <a:avLst/>
-          </a:prstGeom>
-        </p:spPr>
-      </p:pic>
-      <p:sp>
-        <p:nvSpPr>
-          <p:cNvPr id="6" name="TextBox 5"/>
-          <p:cNvSpPr txBox="1"/>
-          <p:nvPr/>
-        </p:nvSpPr>
-        <p:spPr>
-          <a:xfrm>
-            <a:off x="5669280" y="3744856"/>
-            <a:ext cx="3200400" cy="274320"/>
-          </a:xfrm>
-          <a:prstGeom prst="rect">
-            <a:avLst/>
-          </a:prstGeom>
-          <a:noFill/>
-        </p:spPr>
-        <p:txBody>
-          <a:bodyPr wrap="square" anchor="t" lIns="25400" rIns="25400" tIns="12700" bIns="12700">
-            <a:spAutoFit/>
-          </a:bodyPr>
-          <a:lstStyle/>
-          <a:p>
-            <a:pPr algn="ctr"/>
-            <a:r>
-              <a:rPr sz="800" b="0" i="1">
-                <a:solidFill>
-                  <a:srgbClr val="6B7F95"/>
-                </a:solidFill>
-                <a:latin typeface="Calibri"/>
-              </a:rPr>
-              <a:t>Mở vision = bước tạo khác biệt</a:t>
-            </a:r>
-          </a:p>
-        </p:txBody>
-      </p:sp>
-      <p:sp>
-        <p:nvSpPr>
-          <p:cNvPr id="7" name="Rectangle 6"/>
+        </p:nvGraphicFramePr>
+        <p:xfrm>
+          <a:off x="365760" y="1417320"/>
+          <a:ext cx="8412480" cy="2834640"/>
+        </p:xfrm>
+        <a:graphic>
+          <a:graphicData uri="http://schemas.openxmlformats.org/drawingml/2006/table">
+            <a:tbl>
+              <a:tblPr>
+                <a:tableStyleId>{5C22544A-7EE6-4342-B048-85BDC9FD1C3A}</a:tableStyleId>
+              </a:tblPr>
+              <a:tblGrid>
+                <a:gridCol w="4023360"/>
+                <a:gridCol w="4389120"/>
+              </a:tblGrid>
+              <a:tr h="566928">
+                <a:tc>
+                  <a:txBody>
+                    <a:bodyPr/>
+                    <a:lstStyle/>
+                    <a:p>
+                      <a:r>
+                        <a:rPr sz="1200" b="1" i="0">
+                          <a:solidFill>
+                            <a:srgbClr val="FFFFFF"/>
+                          </a:solidFill>
+                          <a:latin typeface="Calibri"/>
+                        </a:rPr>
+                        <a:t>Hạn chế của MedRegA</a:t>
+                      </a:r>
+                    </a:p>
+                  </a:txBody>
+                  <a:tcPr anchor="ctr" marL="63500" marT="25400" marB="25400">
+                    <a:solidFill>
+                      <a:srgbClr val="1A3A5C"/>
+                    </a:solidFill>
+                  </a:tcPr>
+                </a:tc>
+                <a:tc>
+                  <a:txBody>
+                    <a:bodyPr/>
+                    <a:lstStyle/>
+                    <a:p>
+                      <a:r>
+                        <a:rPr sz="1200" b="1" i="0">
+                          <a:solidFill>
+                            <a:srgbClr val="FFFFFF"/>
+                          </a:solidFill>
+                          <a:latin typeface="Calibri"/>
+                        </a:rPr>
+                        <a:t>Lựa chọn của nhóm (vì sao)</a:t>
+                      </a:r>
+                    </a:p>
+                  </a:txBody>
+                  <a:tcPr anchor="ctr" marL="63500" marT="25400" marB="25400">
+                    <a:solidFill>
+                      <a:srgbClr val="1A3A5C"/>
+                    </a:solidFill>
+                  </a:tcPr>
+                </a:tc>
+              </a:tr>
+              <a:tr h="566928">
+                <a:tc>
+                  <a:txBody>
+                    <a:bodyPr/>
+                    <a:lstStyle/>
+                    <a:p>
+                      <a:r>
+                        <a:rPr sz="1150" b="0" i="0">
+                          <a:solidFill>
+                            <a:srgbClr val="1C2736"/>
+                          </a:solidFill>
+                          <a:latin typeface="Calibri"/>
+                        </a:rPr>
+                        <a:t>Dồn lên </a:t>
+                      </a:r>
+                      <a:r>
+                        <a:rPr sz="1150" b="1" i="0">
+                          <a:solidFill>
+                            <a:srgbClr val="1C2736"/>
+                          </a:solidFill>
+                          <a:latin typeface="Calibri"/>
+                        </a:rPr>
+                        <a:t>LLM 40B</a:t>
+                      </a:r>
+                      <a:r>
+                        <a:rPr sz="1150" b="0" i="0">
+                          <a:solidFill>
+                            <a:srgbClr val="1C2736"/>
+                          </a:solidFill>
+                          <a:latin typeface="Calibri"/>
+                        </a:rPr>
+                        <a:t>; “mắt” &amp; “cầu” bất động → định vị không sắc</a:t>
+                      </a:r>
+                    </a:p>
+                  </a:txBody>
+                  <a:tcPr anchor="ctr" marL="63500" marT="12700" marB="12700">
+                    <a:solidFill>
+                      <a:srgbClr val="FFFFFF"/>
+                    </a:solidFill>
+                  </a:tcPr>
+                </a:tc>
+                <a:tc>
+                  <a:txBody>
+                    <a:bodyPr/>
+                    <a:lstStyle/>
+                    <a:p>
+                      <a:r>
+                        <a:rPr sz="1150" b="1" i="0">
+                          <a:solidFill>
+                            <a:srgbClr val="1C2736"/>
+                          </a:solidFill>
+                          <a:latin typeface="Calibri"/>
+                        </a:rPr>
+                        <a:t>Gemma 4 E4B (~8B)</a:t>
+                      </a:r>
+                      <a:r>
+                        <a:rPr sz="1150" b="0" i="0">
+                          <a:solidFill>
+                            <a:srgbClr val="1C2736"/>
+                          </a:solidFill>
+                          <a:latin typeface="Calibri"/>
+                        </a:rPr>
+                        <a:t> + </a:t>
+                      </a:r>
+                      <a:r>
+                        <a:rPr sz="1150" b="1" i="0">
+                          <a:solidFill>
+                            <a:srgbClr val="1C2736"/>
+                          </a:solidFill>
+                          <a:latin typeface="Calibri"/>
+                        </a:rPr>
+                        <a:t>mở khoá vision</a:t>
+                      </a:r>
+                      <a:r>
+                        <a:rPr sz="1150" b="0" i="0">
+                          <a:solidFill>
+                            <a:srgbClr val="1C2736"/>
+                          </a:solidFill>
+                          <a:latin typeface="Calibri"/>
+                        </a:rPr>
+                        <a:t> (pIoU 0.015→0.27)</a:t>
+                      </a:r>
+                    </a:p>
+                  </a:txBody>
+                  <a:tcPr anchor="ctr" marL="63500" marT="12700" marB="12700">
+                    <a:solidFill>
+                      <a:srgbClr val="FFFFFF"/>
+                    </a:solidFill>
+                  </a:tcPr>
+                </a:tc>
+              </a:tr>
+              <a:tr h="566928">
+                <a:tc>
+                  <a:txBody>
+                    <a:bodyPr/>
+                    <a:lstStyle/>
+                    <a:p>
+                      <a:r>
+                        <a:rPr sz="1150" b="0" i="0">
+                          <a:solidFill>
+                            <a:srgbClr val="1C2736"/>
+                          </a:solidFill>
+                          <a:latin typeface="Calibri"/>
+                        </a:rPr>
+                        <a:t>Chỉ </a:t>
+                      </a:r>
+                      <a:r>
+                        <a:rPr sz="1150" b="1" i="0">
+                          <a:solidFill>
+                            <a:srgbClr val="1C2736"/>
+                          </a:solidFill>
+                          <a:latin typeface="Calibri"/>
+                        </a:rPr>
+                        <a:t>1 lát trung tâm</a:t>
+                      </a:r>
+                      <a:r>
+                        <a:rPr sz="1150" b="0" i="0">
+                          <a:solidFill>
+                            <a:srgbClr val="1C2736"/>
+                          </a:solidFill>
+                          <a:latin typeface="Calibri"/>
+                        </a:rPr>
+                        <a:t>, </a:t>
+                      </a:r>
+                      <a:r>
+                        <a:rPr sz="1150" b="1" i="0">
+                          <a:solidFill>
+                            <a:srgbClr val="1C2736"/>
+                          </a:solidFill>
+                          <a:latin typeface="Calibri"/>
+                        </a:rPr>
+                        <a:t>không ca âm</a:t>
+                      </a:r>
+                      <a:r>
+                        <a:rPr sz="1150" b="0" i="0">
+                          <a:solidFill>
+                            <a:srgbClr val="1C2736"/>
+                          </a:solidFill>
+                          <a:latin typeface="Calibri"/>
+                        </a:rPr>
+                        <a:t>, box gộp thô</a:t>
+                      </a:r>
+                    </a:p>
+                  </a:txBody>
+                  <a:tcPr anchor="ctr" marL="63500" marT="12700" marB="12700">
+                    <a:solidFill>
+                      <a:srgbClr val="E8F0F8"/>
+                    </a:solidFill>
+                  </a:tcPr>
+                </a:tc>
+                <a:tc>
+                  <a:txBody>
+                    <a:bodyPr/>
+                    <a:lstStyle/>
+                    <a:p>
+                      <a:r>
+                        <a:rPr sz="1150" b="1" i="0">
+                          <a:solidFill>
+                            <a:srgbClr val="1C2736"/>
+                          </a:solidFill>
+                          <a:latin typeface="Calibri"/>
+                        </a:rPr>
+                        <a:t>Đa lát + ca âm + multi-box</a:t>
+                      </a:r>
+                      <a:r>
+                        <a:rPr sz="1150" b="0" i="0">
+                          <a:solidFill>
+                            <a:srgbClr val="1C2736"/>
+                          </a:solidFill>
+                          <a:latin typeface="Calibri"/>
+                        </a:rPr>
+                        <a:t> (tách từng ổ); split theo bệnh nhân</a:t>
+                      </a:r>
+                    </a:p>
+                  </a:txBody>
+                  <a:tcPr anchor="ctr" marL="63500" marT="12700" marB="12700">
+                    <a:solidFill>
+                      <a:srgbClr val="E8F0F8"/>
+                    </a:solidFill>
+                  </a:tcPr>
+                </a:tc>
+              </a:tr>
+              <a:tr h="566928">
+                <a:tc>
+                  <a:txBody>
+                    <a:bodyPr/>
+                    <a:lstStyle/>
+                    <a:p>
+                      <a:r>
+                        <a:rPr sz="1150" b="0" i="0">
+                          <a:solidFill>
+                            <a:srgbClr val="1C2736"/>
+                          </a:solidFill>
+                          <a:latin typeface="Calibri"/>
+                        </a:rPr>
+                        <a:t>Chi phí </a:t>
+                      </a:r>
+                      <a:r>
+                        <a:rPr sz="1150" b="1" i="0">
+                          <a:solidFill>
+                            <a:srgbClr val="1C2736"/>
+                          </a:solidFill>
+                          <a:latin typeface="Calibri"/>
+                        </a:rPr>
+                        <a:t>16×H800</a:t>
+                      </a:r>
+                      <a:r>
+                        <a:rPr sz="1150" b="0" i="0">
+                          <a:solidFill>
+                            <a:srgbClr val="1C2736"/>
+                          </a:solidFill>
+                          <a:latin typeface="Calibri"/>
+                        </a:rPr>
+                        <a:t> — ngoài tầm sinh viên</a:t>
+                      </a:r>
+                    </a:p>
+                  </a:txBody>
+                  <a:tcPr anchor="ctr" marL="63500" marT="12700" marB="12700">
+                    <a:solidFill>
+                      <a:srgbClr val="FFFFFF"/>
+                    </a:solidFill>
+                  </a:tcPr>
+                </a:tc>
+                <a:tc>
+                  <a:txBody>
+                    <a:bodyPr/>
+                    <a:lstStyle/>
+                    <a:p>
+                      <a:r>
+                        <a:rPr sz="1150" b="1" i="0">
+                          <a:solidFill>
+                            <a:srgbClr val="1C2736"/>
+                          </a:solidFill>
+                          <a:latin typeface="Calibri"/>
+                        </a:rPr>
+                        <a:t>LoRA + full-finetune vision</a:t>
+                      </a:r>
+                      <a:r>
+                        <a:rPr sz="1150" b="0" i="0">
+                          <a:solidFill>
+                            <a:srgbClr val="1C2736"/>
+                          </a:solidFill>
+                          <a:latin typeface="Calibri"/>
+                        </a:rPr>
+                        <a:t>, chạy </a:t>
+                      </a:r>
+                      <a:r>
+                        <a:rPr sz="1150" b="1" i="0">
+                          <a:solidFill>
+                            <a:srgbClr val="1C2736"/>
+                          </a:solidFill>
+                          <a:latin typeface="Calibri"/>
+                        </a:rPr>
+                        <a:t>1 GPU</a:t>
+                      </a:r>
+                    </a:p>
+                  </a:txBody>
+                  <a:tcPr anchor="ctr" marL="63500" marT="12700" marB="12700">
+                    <a:solidFill>
+                      <a:srgbClr val="FFFFFF"/>
+                    </a:solidFill>
+                  </a:tcPr>
+                </a:tc>
+              </a:tr>
+              <a:tr h="566928">
+                <a:tc>
+                  <a:txBody>
+                    <a:bodyPr/>
+                    <a:lstStyle/>
+                    <a:p>
+                      <a:r>
+                        <a:rPr sz="1150" b="1" i="0">
+                          <a:solidFill>
+                            <a:srgbClr val="1C2736"/>
+                          </a:solidFill>
+                          <a:latin typeface="Calibri"/>
+                        </a:rPr>
+                        <a:t>Per-image</a:t>
+                      </a:r>
+                      <a:r>
+                        <a:rPr sz="1150" b="0" i="0">
+                          <a:solidFill>
+                            <a:srgbClr val="1C2736"/>
+                          </a:solidFill>
+                          <a:latin typeface="Calibri"/>
+                        </a:rPr>
+                        <a:t> (pseudoreplication); không abstain / CI</a:t>
+                      </a:r>
+                    </a:p>
+                  </a:txBody>
+                  <a:tcPr anchor="ctr" marL="63500" marT="12700" marB="12700">
+                    <a:solidFill>
+                      <a:srgbClr val="E8F0F8"/>
+                    </a:solidFill>
+                  </a:tcPr>
+                </a:tc>
+                <a:tc>
+                  <a:txBody>
+                    <a:bodyPr/>
+                    <a:lstStyle/>
+                    <a:p>
+                      <a:r>
+                        <a:rPr sz="1150" b="1" i="0">
+                          <a:solidFill>
+                            <a:srgbClr val="1C2736"/>
+                          </a:solidFill>
+                          <a:latin typeface="Calibri"/>
+                        </a:rPr>
+                        <a:t>Per-patient + CI</a:t>
+                      </a:r>
+                      <a:r>
+                        <a:rPr sz="1150" b="0" i="0">
+                          <a:solidFill>
+                            <a:srgbClr val="1C2736"/>
+                          </a:solidFill>
+                          <a:latin typeface="Calibri"/>
+                        </a:rPr>
+                        <a:t>, tách detect/localize, </a:t>
+                      </a:r>
+                      <a:r>
+                        <a:rPr sz="1150" b="1" i="0">
+                          <a:solidFill>
+                            <a:srgbClr val="1C2736"/>
+                          </a:solidFill>
+                          <a:latin typeface="Calibri"/>
+                        </a:rPr>
+                        <a:t>selective prediction</a:t>
+                      </a:r>
+                    </a:p>
+                  </a:txBody>
+                  <a:tcPr anchor="ctr" marL="63500" marT="12700" marB="12700">
+                    <a:solidFill>
+                      <a:srgbClr val="E8F0F8"/>
+                    </a:solidFill>
+                  </a:tcPr>
+                </a:tc>
+              </a:tr>
+            </a:tbl>
+          </a:graphicData>
+        </a:graphic>
+      </p:graphicFrame>
+      <p:sp>
+        <p:nvSpPr>
+          <p:cNvPr id="6" name="Rectangle 5"/>
           <p:cNvSpPr/>
           <p:nvPr/>
         </p:nvSpPr>
@@ -3838,7 +3925,7 @@
       </p:sp>
       <p:sp>
         <p:nvSpPr>
-          <p:cNvPr id="8" name="TextBox 7"/>
+          <p:cNvPr id="7" name="TextBox 6"/>
           <p:cNvSpPr txBox="1"/>
           <p:nvPr/>
         </p:nvSpPr>
@@ -3872,7 +3959,7 @@
       </p:sp>
       <p:sp>
         <p:nvSpPr>
-          <p:cNvPr id="9" name="TextBox 8"/>
+          <p:cNvPr id="8" name="TextBox 7"/>
           <p:cNvSpPr txBox="1"/>
           <p:nvPr/>
         </p:nvSpPr>

--- a/seminar/cai_tien/slides_5min_VN.pptx
+++ b/seminar/cai_tien/slides_5min_VN.pptx
@@ -4019,7 +4019,7 @@
         <p:spPr>
           <a:xfrm>
             <a:off x="0" y="0"/>
-            <a:ext cx="9144000" cy="886968"/>
+            <a:ext cx="9144000" cy="1188720"/>
           </a:xfrm>
           <a:prstGeom prst="rect">
             <a:avLst/>
@@ -4062,7 +4062,7 @@
         </p:nvSpPr>
         <p:spPr>
           <a:xfrm>
-            <a:off x="320040" y="182880"/>
+            <a:off x="320040" y="109728"/>
             <a:ext cx="8503920" cy="548640"/>
           </a:xfrm>
           <a:prstGeom prst="rect">
@@ -4083,456 +4083,21 @@
                 </a:solidFill>
                 <a:latin typeface="Cambria"/>
               </a:rPr>
-              <a:t>Kết quả vs baseline (zero-shot → fine-tune)</a:t>
-            </a:r>
-          </a:p>
-        </p:txBody>
-      </p:sp>
-      <p:graphicFrame>
-        <p:nvGraphicFramePr>
-          <p:cNvPr id="4" name="Table 3"/>
-          <p:cNvGraphicFramePr>
-            <a:graphicFrameLocks noGrp="1"/>
-          </p:cNvGraphicFramePr>
-          <p:nvPr/>
-        </p:nvGraphicFramePr>
-        <p:xfrm>
-          <a:off x="365760" y="1069848"/>
-          <a:ext cx="5029200" cy="2194560"/>
-        </p:xfrm>
-        <a:graphic>
-          <a:graphicData uri="http://schemas.openxmlformats.org/drawingml/2006/table">
-            <a:tbl>
-              <a:tblPr>
-                <a:tableStyleId>{5C22544A-7EE6-4342-B048-85BDC9FD1C3A}</a:tableStyleId>
-              </a:tblPr>
-              <a:tblGrid>
-                <a:gridCol w="2651760"/>
-                <a:gridCol w="1188720"/>
-                <a:gridCol w="1188720"/>
-              </a:tblGrid>
-              <a:tr h="365760">
-                <a:tc>
-                  <a:txBody>
-                    <a:bodyPr/>
-                    <a:lstStyle/>
-                    <a:p>
-                      <a:r>
-                        <a:rPr sz="1100" b="1" i="0">
-                          <a:solidFill>
-                            <a:srgbClr val="FFFFFF"/>
-                          </a:solidFill>
-                          <a:latin typeface="Calibri"/>
-                        </a:rPr>
-                        <a:t>Chỉ số</a:t>
-                      </a:r>
-                    </a:p>
-                  </a:txBody>
-                  <a:tcPr anchor="ctr" marL="63500" marT="25400" marB="25400">
-                    <a:solidFill>
-                      <a:srgbClr val="1A3A5C"/>
-                    </a:solidFill>
-                  </a:tcPr>
-                </a:tc>
-                <a:tc>
-                  <a:txBody>
-                    <a:bodyPr/>
-                    <a:lstStyle/>
-                    <a:p>
-                      <a:r>
-                        <a:rPr sz="1100" b="1" i="0">
-                          <a:solidFill>
-                            <a:srgbClr val="FFFFFF"/>
-                          </a:solidFill>
-                          <a:latin typeface="Calibri"/>
-                        </a:rPr>
-                        <a:t>Baseline</a:t>
-                      </a:r>
-                    </a:p>
-                  </a:txBody>
-                  <a:tcPr anchor="ctr" marL="63500" marT="25400" marB="25400">
-                    <a:solidFill>
-                      <a:srgbClr val="1A3A5C"/>
-                    </a:solidFill>
-                  </a:tcPr>
-                </a:tc>
-                <a:tc>
-                  <a:txBody>
-                    <a:bodyPr/>
-                    <a:lstStyle/>
-                    <a:p>
-                      <a:r>
-                        <a:rPr sz="1100" b="1" i="0">
-                          <a:solidFill>
-                            <a:srgbClr val="FFFFFF"/>
-                          </a:solidFill>
-                          <a:latin typeface="Calibri"/>
-                        </a:rPr>
-                        <a:t>Của mình</a:t>
-                      </a:r>
-                    </a:p>
-                  </a:txBody>
-                  <a:tcPr anchor="ctr" marL="63500" marT="25400" marB="25400">
-                    <a:solidFill>
-                      <a:srgbClr val="1A3A5C"/>
-                    </a:solidFill>
-                  </a:tcPr>
-                </a:tc>
-              </a:tr>
-              <a:tr h="365760">
-                <a:tc>
-                  <a:txBody>
-                    <a:bodyPr/>
-                    <a:lstStyle/>
-                    <a:p>
-                      <a:r>
-                        <a:rPr sz="1100" b="1" i="0">
-                          <a:solidFill>
-                            <a:srgbClr val="1C2736"/>
-                          </a:solidFill>
-                          <a:latin typeface="Calibri"/>
-                        </a:rPr>
-                        <a:t>Detection F1 (bệnh nhân)</a:t>
-                      </a:r>
-                    </a:p>
-                  </a:txBody>
-                  <a:tcPr anchor="ctr" marL="63500" marT="12700" marB="12700">
-                    <a:solidFill>
-                      <a:srgbClr val="FFFFFF"/>
-                    </a:solidFill>
-                  </a:tcPr>
-                </a:tc>
-                <a:tc>
-                  <a:txBody>
-                    <a:bodyPr/>
-                    <a:lstStyle/>
-                    <a:p>
-                      <a:r>
-                        <a:rPr sz="1100" b="0" i="0">
-                          <a:solidFill>
-                            <a:srgbClr val="1C2736"/>
-                          </a:solidFill>
-                          <a:latin typeface="Calibri"/>
-                        </a:rPr>
-                        <a:t>0.33</a:t>
-                      </a:r>
-                    </a:p>
-                  </a:txBody>
-                  <a:tcPr anchor="ctr" marL="63500" marT="12700" marB="12700">
-                    <a:solidFill>
-                      <a:srgbClr val="FFFFFF"/>
-                    </a:solidFill>
-                  </a:tcPr>
-                </a:tc>
-                <a:tc>
-                  <a:txBody>
-                    <a:bodyPr/>
-                    <a:lstStyle/>
-                    <a:p>
-                      <a:r>
-                        <a:rPr sz="1100" b="0" i="0">
-                          <a:solidFill>
-                            <a:srgbClr val="1C2736"/>
-                          </a:solidFill>
-                          <a:latin typeface="Calibri"/>
-                        </a:rPr>
-                        <a:t>0.89</a:t>
-                      </a:r>
-                    </a:p>
-                  </a:txBody>
-                  <a:tcPr anchor="ctr" marL="63500" marT="12700" marB="12700">
-                    <a:solidFill>
-                      <a:srgbClr val="FFFFFF"/>
-                    </a:solidFill>
-                  </a:tcPr>
-                </a:tc>
-              </a:tr>
-              <a:tr h="365760">
-                <a:tc>
-                  <a:txBody>
-                    <a:bodyPr/>
-                    <a:lstStyle/>
-                    <a:p>
-                      <a:r>
-                        <a:rPr sz="1100" b="1" i="0">
-                          <a:solidFill>
-                            <a:srgbClr val="1C2736"/>
-                          </a:solidFill>
-                          <a:latin typeface="Calibri"/>
-                        </a:rPr>
-                        <a:t>Sensitivity (bắt u)</a:t>
-                      </a:r>
-                    </a:p>
-                  </a:txBody>
-                  <a:tcPr anchor="ctr" marL="63500" marT="12700" marB="12700">
-                    <a:solidFill>
-                      <a:srgbClr val="E8F0F8"/>
-                    </a:solidFill>
-                  </a:tcPr>
-                </a:tc>
-                <a:tc>
-                  <a:txBody>
-                    <a:bodyPr/>
-                    <a:lstStyle/>
-                    <a:p>
-                      <a:r>
-                        <a:rPr sz="1100" b="0" i="0">
-                          <a:solidFill>
-                            <a:srgbClr val="1C2736"/>
-                          </a:solidFill>
-                          <a:latin typeface="Calibri"/>
-                        </a:rPr>
-                        <a:t>20%</a:t>
-                      </a:r>
-                    </a:p>
-                  </a:txBody>
-                  <a:tcPr anchor="ctr" marL="63500" marT="12700" marB="12700">
-                    <a:solidFill>
-                      <a:srgbClr val="E8F0F8"/>
-                    </a:solidFill>
-                  </a:tcPr>
-                </a:tc>
-                <a:tc>
-                  <a:txBody>
-                    <a:bodyPr/>
-                    <a:lstStyle/>
-                    <a:p>
-                      <a:r>
-                        <a:rPr sz="1100" b="0" i="0">
-                          <a:solidFill>
-                            <a:srgbClr val="1C2736"/>
-                          </a:solidFill>
-                          <a:latin typeface="Calibri"/>
-                        </a:rPr>
-                        <a:t>80%</a:t>
-                      </a:r>
-                    </a:p>
-                  </a:txBody>
-                  <a:tcPr anchor="ctr" marL="63500" marT="12700" marB="12700">
-                    <a:solidFill>
-                      <a:srgbClr val="E8F0F8"/>
-                    </a:solidFill>
-                  </a:tcPr>
-                </a:tc>
-              </a:tr>
-              <a:tr h="365760">
-                <a:tc>
-                  <a:txBody>
-                    <a:bodyPr/>
-                    <a:lstStyle/>
-                    <a:p>
-                      <a:r>
-                        <a:rPr sz="1100" b="1" i="0">
-                          <a:solidFill>
-                            <a:srgbClr val="1C2736"/>
-                          </a:solidFill>
-                          <a:latin typeface="Calibri"/>
-                        </a:rPr>
-                        <a:t>Localization pIoU</a:t>
-                      </a:r>
-                    </a:p>
-                  </a:txBody>
-                  <a:tcPr anchor="ctr" marL="63500" marT="12700" marB="12700">
-                    <a:solidFill>
-                      <a:srgbClr val="FFFFFF"/>
-                    </a:solidFill>
-                  </a:tcPr>
-                </a:tc>
-                <a:tc>
-                  <a:txBody>
-                    <a:bodyPr/>
-                    <a:lstStyle/>
-                    <a:p>
-                      <a:r>
-                        <a:rPr sz="1100" b="0" i="0">
-                          <a:solidFill>
-                            <a:srgbClr val="1C2736"/>
-                          </a:solidFill>
-                          <a:latin typeface="Calibri"/>
-                        </a:rPr>
-                        <a:t>0.002</a:t>
-                      </a:r>
-                    </a:p>
-                  </a:txBody>
-                  <a:tcPr anchor="ctr" marL="63500" marT="12700" marB="12700">
-                    <a:solidFill>
-                      <a:srgbClr val="FFFFFF"/>
-                    </a:solidFill>
-                  </a:tcPr>
-                </a:tc>
-                <a:tc>
-                  <a:txBody>
-                    <a:bodyPr/>
-                    <a:lstStyle/>
-                    <a:p>
-                      <a:r>
-                        <a:rPr sz="1100" b="0" i="0">
-                          <a:solidFill>
-                            <a:srgbClr val="1C2736"/>
-                          </a:solidFill>
-                          <a:latin typeface="Calibri"/>
-                        </a:rPr>
-                        <a:t>0.27</a:t>
-                      </a:r>
-                    </a:p>
-                  </a:txBody>
-                  <a:tcPr anchor="ctr" marL="63500" marT="12700" marB="12700">
-                    <a:solidFill>
-                      <a:srgbClr val="FFFFFF"/>
-                    </a:solidFill>
-                  </a:tcPr>
-                </a:tc>
-              </a:tr>
-              <a:tr h="365760">
-                <a:tc>
-                  <a:txBody>
-                    <a:bodyPr/>
-                    <a:lstStyle/>
-                    <a:p>
-                      <a:r>
-                        <a:rPr sz="1100" b="1" i="0">
-                          <a:solidFill>
-                            <a:srgbClr val="1C2736"/>
-                          </a:solidFill>
-                          <a:latin typeface="Calibri"/>
-                        </a:rPr>
-                        <a:t>recall@IoU 0.25</a:t>
-                      </a:r>
-                    </a:p>
-                  </a:txBody>
-                  <a:tcPr anchor="ctr" marL="63500" marT="12700" marB="12700">
-                    <a:solidFill>
-                      <a:srgbClr val="E8F0F8"/>
-                    </a:solidFill>
-                  </a:tcPr>
-                </a:tc>
-                <a:tc>
-                  <a:txBody>
-                    <a:bodyPr/>
-                    <a:lstStyle/>
-                    <a:p>
-                      <a:r>
-                        <a:rPr sz="1100" b="0" i="0">
-                          <a:solidFill>
-                            <a:srgbClr val="1C2736"/>
-                          </a:solidFill>
-                          <a:latin typeface="Calibri"/>
-                        </a:rPr>
-                        <a:t>0%</a:t>
-                      </a:r>
-                    </a:p>
-                  </a:txBody>
-                  <a:tcPr anchor="ctr" marL="63500" marT="12700" marB="12700">
-                    <a:solidFill>
-                      <a:srgbClr val="E8F0F8"/>
-                    </a:solidFill>
-                  </a:tcPr>
-                </a:tc>
-                <a:tc>
-                  <a:txBody>
-                    <a:bodyPr/>
-                    <a:lstStyle/>
-                    <a:p>
-                      <a:r>
-                        <a:rPr sz="1100" b="0" i="0">
-                          <a:solidFill>
-                            <a:srgbClr val="1C2736"/>
-                          </a:solidFill>
-                          <a:latin typeface="Calibri"/>
-                        </a:rPr>
-                        <a:t>54%</a:t>
-                      </a:r>
-                    </a:p>
-                  </a:txBody>
-                  <a:tcPr anchor="ctr" marL="63500" marT="12700" marB="12700">
-                    <a:solidFill>
-                      <a:srgbClr val="E8F0F8"/>
-                    </a:solidFill>
-                  </a:tcPr>
-                </a:tc>
-              </a:tr>
-              <a:tr h="365760">
-                <a:tc>
-                  <a:txBody>
-                    <a:bodyPr/>
-                    <a:lstStyle/>
-                    <a:p>
-                      <a:r>
-                        <a:rPr sz="1100" b="1" i="0">
-                          <a:solidFill>
-                            <a:srgbClr val="1C2736"/>
-                          </a:solidFill>
-                          <a:latin typeface="Calibri"/>
-                        </a:rPr>
-                        <a:t>False-positive (lát âm)</a:t>
-                      </a:r>
-                    </a:p>
-                  </a:txBody>
-                  <a:tcPr anchor="ctr" marL="63500" marT="12700" marB="12700">
-                    <a:solidFill>
-                      <a:srgbClr val="FFFFFF"/>
-                    </a:solidFill>
-                  </a:tcPr>
-                </a:tc>
-                <a:tc>
-                  <a:txBody>
-                    <a:bodyPr/>
-                    <a:lstStyle/>
-                    <a:p>
-                      <a:r>
-                        <a:rPr sz="1100" b="0" i="0">
-                          <a:solidFill>
-                            <a:srgbClr val="1C2736"/>
-                          </a:solidFill>
-                          <a:latin typeface="Calibri"/>
-                        </a:rPr>
-                        <a:t>2.2%</a:t>
-                      </a:r>
-                    </a:p>
-                  </a:txBody>
-                  <a:tcPr anchor="ctr" marL="63500" marT="12700" marB="12700">
-                    <a:solidFill>
-                      <a:srgbClr val="FFFFFF"/>
-                    </a:solidFill>
-                  </a:tcPr>
-                </a:tc>
-                <a:tc>
-                  <a:txBody>
-                    <a:bodyPr/>
-                    <a:lstStyle/>
-                    <a:p>
-                      <a:r>
-                        <a:rPr sz="1100" b="0" i="0">
-                          <a:solidFill>
-                            <a:srgbClr val="1C2736"/>
-                          </a:solidFill>
-                          <a:latin typeface="Calibri"/>
-                        </a:rPr>
-                        <a:t>1.5%</a:t>
-                      </a:r>
-                    </a:p>
-                  </a:txBody>
-                  <a:tcPr anchor="ctr" marL="63500" marT="12700" marB="12700">
-                    <a:solidFill>
-                      <a:srgbClr val="FFFFFF"/>
-                    </a:solidFill>
-                  </a:tcPr>
-                </a:tc>
-              </a:tr>
-            </a:tbl>
-          </a:graphicData>
-        </a:graphic>
-      </p:graphicFrame>
-      <p:sp>
-        <p:nvSpPr>
-          <p:cNvPr id="5" name="TextBox 4"/>
+              <a:t>Kết quả của nhóm</a:t>
+            </a:r>
+          </a:p>
+        </p:txBody>
+      </p:sp>
+      <p:sp>
+        <p:nvSpPr>
+          <p:cNvPr id="4" name="TextBox 3"/>
           <p:cNvSpPr txBox="1"/>
           <p:nvPr/>
         </p:nvSpPr>
         <p:spPr>
           <a:xfrm>
-            <a:off x="365760" y="3172968"/>
-            <a:ext cx="5029200" cy="640080"/>
+            <a:off x="338328" y="694944"/>
+            <a:ext cx="8412480" cy="411480"/>
           </a:xfrm>
           <a:prstGeom prst="rect">
             <a:avLst/>
@@ -4545,60 +4110,34 @@
           </a:bodyPr>
           <a:lstStyle/>
           <a:p>
-            <a:pPr>
-              <a:spcBef>
-                <a:spcPts val="0"/>
-              </a:spcBef>
-              <a:spcAft>
-                <a:spcPts val="900"/>
-              </a:spcAft>
-            </a:pPr>
-            <a:r>
-              <a:rPr sz="1200" b="1" i="0">
-                <a:solidFill>
-                  <a:srgbClr val="1A3A5C"/>
-                </a:solidFill>
-                <a:latin typeface="Calibri"/>
-              </a:rPr>
-              <a:t>▪  </a:t>
-            </a:r>
-            <a:r>
-              <a:rPr sz="1200" b="1" i="0">
-                <a:solidFill>
-                  <a:srgbClr val="1C2736"/>
-                </a:solidFill>
-                <a:latin typeface="Calibri"/>
-              </a:rPr>
-              <a:t>Không quên:</a:t>
-            </a:r>
-            <a:r>
-              <a:rPr sz="1200" b="0" i="0">
-                <a:solidFill>
-                  <a:srgbClr val="1C2736"/>
-                </a:solidFill>
-                <a:latin typeface="Calibri"/>
-              </a:rPr>
-              <a:t> vẫn hội thoại / JSON / thơ / toán (LoRA giữ trọng số gốc).</a:t>
-            </a:r>
-          </a:p>
-        </p:txBody>
-      </p:sp>
-      <p:sp>
-        <p:nvSpPr>
-          <p:cNvPr id="6" name="Rectangle 5"/>
+            <a:r>
+              <a:rPr sz="1150" b="0" i="1">
+                <a:solidFill>
+                  <a:srgbClr val="B8CFE0"/>
+                </a:solidFill>
+                <a:latin typeface="Calibri"/>
+              </a:rPr>
+              <a:t>Model của nhóm đạt được — công bố trực tiếp</a:t>
+            </a:r>
+          </a:p>
+        </p:txBody>
+      </p:sp>
+      <p:sp>
+        <p:nvSpPr>
+          <p:cNvPr id="5" name="Rectangle 4"/>
           <p:cNvSpPr/>
           <p:nvPr/>
         </p:nvSpPr>
         <p:spPr>
           <a:xfrm>
-            <a:off x="365760" y="3767328"/>
-            <a:ext cx="5029200" cy="640080"/>
+            <a:off x="365760" y="1435607"/>
+            <a:ext cx="2697480" cy="1234440"/>
           </a:xfrm>
           <a:prstGeom prst="rect">
             <a:avLst/>
           </a:prstGeom>
           <a:solidFill>
-            <a:srgbClr val="FBF1F1"/>
+            <a:srgbClr val="E8F0F8"/>
           </a:solidFill>
           <a:ln>
             <a:noFill/>
@@ -4629,14 +4168,14 @@
       </p:sp>
       <p:sp>
         <p:nvSpPr>
-          <p:cNvPr id="7" name="TextBox 6"/>
+          <p:cNvPr id="6" name="TextBox 5"/>
           <p:cNvSpPr txBox="1"/>
           <p:nvPr/>
         </p:nvSpPr>
         <p:spPr>
           <a:xfrm>
-            <a:off x="475488" y="3831336"/>
-            <a:ext cx="4809744" cy="512063"/>
+            <a:off x="365760" y="1563624"/>
+            <a:ext cx="2697480" cy="641908"/>
           </a:xfrm>
           <a:prstGeom prst="rect">
             <a:avLst/>
@@ -4644,73 +4183,34 @@
           <a:noFill/>
         </p:spPr>
         <p:txBody>
-          <a:bodyPr wrap="square" anchor="t" lIns="25400" rIns="25400" tIns="12700" bIns="12700">
+          <a:bodyPr wrap="square" anchor="b" lIns="25400" rIns="25400" tIns="12700" bIns="12700">
             <a:spAutoFit/>
           </a:bodyPr>
           <a:lstStyle/>
           <a:p>
-            <a:r>
-              <a:rPr sz="1050" b="1" i="0">
-                <a:solidFill>
-                  <a:srgbClr val="A04646"/>
-                </a:solidFill>
-                <a:latin typeface="Calibri"/>
-              </a:rPr>
-              <a:t>⚠ Lưu ý</a:t>
-            </a:r>
-          </a:p>
-          <a:p>
-            <a:pPr>
-              <a:spcBef>
-                <a:spcPts val="100"/>
-              </a:spcBef>
-            </a:pPr>
-            <a:r>
-              <a:rPr sz="1000" b="0" i="0">
-                <a:solidFill>
-                  <a:srgbClr val="1C2736"/>
-                </a:solidFill>
-                <a:latin typeface="Calibri"/>
-              </a:rPr>
-              <a:t>n nhỏ (~25 bn dương, 2 âm) → CI rộng; đây là PoC, không tuyên bố lâm sàng.</a:t>
-            </a:r>
-          </a:p>
-        </p:txBody>
-      </p:sp>
-      <p:pic>
-        <p:nvPicPr>
-          <p:cNvPr id="8" name="Picture 7" descr="detect_before_after.png"/>
-          <p:cNvPicPr>
-            <a:picLocks noChangeAspect="1"/>
-          </p:cNvPicPr>
-          <p:nvPr/>
-        </p:nvPicPr>
-        <p:blipFill>
-          <a:blip r:embed="rId2"/>
-          <a:stretch>
-            <a:fillRect/>
-          </a:stretch>
-        </p:blipFill>
-        <p:spPr>
-          <a:xfrm>
-            <a:off x="5577840" y="1252728"/>
-            <a:ext cx="3383280" cy="1953725"/>
-          </a:xfrm>
-          <a:prstGeom prst="rect">
-            <a:avLst/>
-          </a:prstGeom>
-        </p:spPr>
-      </p:pic>
-      <p:sp>
-        <p:nvSpPr>
-          <p:cNvPr id="9" name="TextBox 8"/>
+            <a:pPr algn="ctr"/>
+            <a:r>
+              <a:rPr sz="3200" b="1" i="0">
+                <a:solidFill>
+                  <a:srgbClr val="1A3A5C"/>
+                </a:solidFill>
+                <a:latin typeface="Cambria"/>
+              </a:rPr>
+              <a:t>0.89</a:t>
+            </a:r>
+          </a:p>
+        </p:txBody>
+      </p:sp>
+      <p:sp>
+        <p:nvSpPr>
+          <p:cNvPr id="7" name="TextBox 6"/>
           <p:cNvSpPr txBox="1"/>
           <p:nvPr/>
         </p:nvSpPr>
         <p:spPr>
           <a:xfrm>
-            <a:off x="5577840" y="3233885"/>
-            <a:ext cx="3383280" cy="274320"/>
+            <a:off x="457200" y="2151583"/>
+            <a:ext cx="2514600" cy="493776"/>
           </a:xfrm>
           <a:prstGeom prst="rect">
             <a:avLst/>
@@ -4725,33 +4225,33 @@
           <a:p>
             <a:pPr algn="ctr"/>
             <a:r>
-              <a:rPr sz="800" b="0" i="1">
-                <a:solidFill>
-                  <a:srgbClr val="6B7F95"/>
-                </a:solidFill>
-                <a:latin typeface="Calibri"/>
-              </a:rPr>
-              <a:t>Trước → sau fine-tune</a:t>
-            </a:r>
-          </a:p>
-        </p:txBody>
-      </p:sp>
-      <p:sp>
-        <p:nvSpPr>
-          <p:cNvPr id="10" name="Rectangle 9"/>
+              <a:rPr sz="1100" b="0" i="0">
+                <a:solidFill>
+                  <a:srgbClr val="1C2736"/>
+                </a:solidFill>
+                <a:latin typeface="Calibri"/>
+              </a:rPr>
+              <a:t>Detection F1 (bệnh nhân)</a:t>
+            </a:r>
+          </a:p>
+        </p:txBody>
+      </p:sp>
+      <p:sp>
+        <p:nvSpPr>
+          <p:cNvPr id="8" name="Rectangle 7"/>
           <p:cNvSpPr/>
           <p:nvPr/>
         </p:nvSpPr>
         <p:spPr>
           <a:xfrm>
-            <a:off x="0" y="4882896"/>
-            <a:ext cx="9144000" cy="265176"/>
+            <a:off x="3227832" y="1435607"/>
+            <a:ext cx="2697480" cy="1234440"/>
           </a:xfrm>
           <a:prstGeom prst="rect">
             <a:avLst/>
           </a:prstGeom>
           <a:solidFill>
-            <a:srgbClr val="EEF4FB"/>
+            <a:srgbClr val="E8F0F8"/>
           </a:solidFill>
           <a:ln>
             <a:noFill/>
@@ -4782,14 +4282,14 @@
       </p:sp>
       <p:sp>
         <p:nvSpPr>
-          <p:cNvPr id="11" name="TextBox 10"/>
+          <p:cNvPr id="9" name="TextBox 8"/>
           <p:cNvSpPr txBox="1"/>
           <p:nvPr/>
         </p:nvSpPr>
         <p:spPr>
           <a:xfrm>
-            <a:off x="320040" y="4937760"/>
-            <a:ext cx="6400800" cy="164592"/>
+            <a:off x="3227832" y="1563624"/>
+            <a:ext cx="2697480" cy="641908"/>
           </a:xfrm>
           <a:prstGeom prst="rect">
             <a:avLst/>
@@ -4797,11 +4297,494 @@
           <a:noFill/>
         </p:spPr>
         <p:txBody>
+          <a:bodyPr wrap="square" anchor="b" lIns="25400" rIns="25400" tIns="12700" bIns="12700">
+            <a:spAutoFit/>
+          </a:bodyPr>
+          <a:lstStyle/>
+          <a:p>
+            <a:pPr algn="ctr"/>
+            <a:r>
+              <a:rPr sz="3200" b="1" i="0">
+                <a:solidFill>
+                  <a:srgbClr val="1A3A5C"/>
+                </a:solidFill>
+                <a:latin typeface="Cambria"/>
+              </a:rPr>
+              <a:t>80%</a:t>
+            </a:r>
+          </a:p>
+        </p:txBody>
+      </p:sp>
+      <p:sp>
+        <p:nvSpPr>
+          <p:cNvPr id="10" name="TextBox 9"/>
+          <p:cNvSpPr txBox="1"/>
+          <p:nvPr/>
+        </p:nvSpPr>
+        <p:spPr>
+          <a:xfrm>
+            <a:off x="3319272" y="2151583"/>
+            <a:ext cx="2514600" cy="493776"/>
+          </a:xfrm>
+          <a:prstGeom prst="rect">
+            <a:avLst/>
+          </a:prstGeom>
+          <a:noFill/>
+        </p:spPr>
+        <p:txBody>
           <a:bodyPr wrap="square" anchor="t" lIns="25400" rIns="25400" tIns="12700" bIns="12700">
             <a:spAutoFit/>
           </a:bodyPr>
           <a:lstStyle/>
           <a:p>
+            <a:pPr algn="ctr"/>
+            <a:r>
+              <a:rPr sz="1100" b="0" i="0">
+                <a:solidFill>
+                  <a:srgbClr val="1C2736"/>
+                </a:solidFill>
+                <a:latin typeface="Calibri"/>
+              </a:rPr>
+              <a:t>Sensitivity — bắt được u</a:t>
+            </a:r>
+          </a:p>
+        </p:txBody>
+      </p:sp>
+      <p:sp>
+        <p:nvSpPr>
+          <p:cNvPr id="11" name="Rectangle 10"/>
+          <p:cNvSpPr/>
+          <p:nvPr/>
+        </p:nvSpPr>
+        <p:spPr>
+          <a:xfrm>
+            <a:off x="6089904" y="1435607"/>
+            <a:ext cx="2697480" cy="1234440"/>
+          </a:xfrm>
+          <a:prstGeom prst="rect">
+            <a:avLst/>
+          </a:prstGeom>
+          <a:solidFill>
+            <a:srgbClr val="E8F0F8"/>
+          </a:solidFill>
+          <a:ln>
+            <a:noFill/>
+          </a:ln>
+          <a:effectLst/>
+        </p:spPr>
+        <p:style>
+          <a:lnRef idx="1">
+            <a:schemeClr val="accent1"/>
+          </a:lnRef>
+          <a:fillRef idx="3">
+            <a:schemeClr val="accent1"/>
+          </a:fillRef>
+          <a:effectRef idx="2">
+            <a:schemeClr val="accent1"/>
+          </a:effectRef>
+          <a:fontRef idx="minor">
+            <a:schemeClr val="lt1"/>
+          </a:fontRef>
+        </p:style>
+        <p:txBody>
+          <a:bodyPr rtlCol="0" anchor="ctr"/>
+          <a:lstStyle/>
+          <a:p>
+            <a:pPr algn="ctr"/>
+          </a:p>
+        </p:txBody>
+      </p:sp>
+      <p:sp>
+        <p:nvSpPr>
+          <p:cNvPr id="12" name="TextBox 11"/>
+          <p:cNvSpPr txBox="1"/>
+          <p:nvPr/>
+        </p:nvSpPr>
+        <p:spPr>
+          <a:xfrm>
+            <a:off x="6089904" y="1563624"/>
+            <a:ext cx="2697480" cy="641908"/>
+          </a:xfrm>
+          <a:prstGeom prst="rect">
+            <a:avLst/>
+          </a:prstGeom>
+          <a:noFill/>
+        </p:spPr>
+        <p:txBody>
+          <a:bodyPr wrap="square" anchor="b" lIns="25400" rIns="25400" tIns="12700" bIns="12700">
+            <a:spAutoFit/>
+          </a:bodyPr>
+          <a:lstStyle/>
+          <a:p>
+            <a:pPr algn="ctr"/>
+            <a:r>
+              <a:rPr sz="3200" b="1" i="0">
+                <a:solidFill>
+                  <a:srgbClr val="1A3A5C"/>
+                </a:solidFill>
+                <a:latin typeface="Cambria"/>
+              </a:rPr>
+              <a:t>0.27</a:t>
+            </a:r>
+          </a:p>
+        </p:txBody>
+      </p:sp>
+      <p:sp>
+        <p:nvSpPr>
+          <p:cNvPr id="13" name="TextBox 12"/>
+          <p:cNvSpPr txBox="1"/>
+          <p:nvPr/>
+        </p:nvSpPr>
+        <p:spPr>
+          <a:xfrm>
+            <a:off x="6181344" y="2151583"/>
+            <a:ext cx="2514600" cy="493776"/>
+          </a:xfrm>
+          <a:prstGeom prst="rect">
+            <a:avLst/>
+          </a:prstGeom>
+          <a:noFill/>
+        </p:spPr>
+        <p:txBody>
+          <a:bodyPr wrap="square" anchor="t" lIns="25400" rIns="25400" tIns="12700" bIns="12700">
+            <a:spAutoFit/>
+          </a:bodyPr>
+          <a:lstStyle/>
+          <a:p>
+            <a:pPr algn="ctr"/>
+            <a:r>
+              <a:rPr sz="1100" b="0" i="0">
+                <a:solidFill>
+                  <a:srgbClr val="1C2736"/>
+                </a:solidFill>
+                <a:latin typeface="Calibri"/>
+              </a:rPr>
+              <a:t>Localization pIoU (định vị)</a:t>
+            </a:r>
+          </a:p>
+        </p:txBody>
+      </p:sp>
+      <p:sp>
+        <p:nvSpPr>
+          <p:cNvPr id="14" name="TextBox 13"/>
+          <p:cNvSpPr txBox="1"/>
+          <p:nvPr/>
+        </p:nvSpPr>
+        <p:spPr>
+          <a:xfrm>
+            <a:off x="365760" y="2825496"/>
+            <a:ext cx="8412480" cy="1371600"/>
+          </a:xfrm>
+          <a:prstGeom prst="rect">
+            <a:avLst/>
+          </a:prstGeom>
+          <a:noFill/>
+        </p:spPr>
+        <p:txBody>
+          <a:bodyPr wrap="square" anchor="t" lIns="25400" rIns="25400" tIns="12700" bIns="12700">
+            <a:spAutoFit/>
+          </a:bodyPr>
+          <a:lstStyle/>
+          <a:p>
+            <a:pPr>
+              <a:spcBef>
+                <a:spcPts val="0"/>
+              </a:spcBef>
+              <a:spcAft>
+                <a:spcPts val="800"/>
+              </a:spcAft>
+            </a:pPr>
+            <a:r>
+              <a:rPr sz="1250" b="1" i="0">
+                <a:solidFill>
+                  <a:srgbClr val="1A3A5C"/>
+                </a:solidFill>
+                <a:latin typeface="Calibri"/>
+              </a:rPr>
+              <a:t>▪  </a:t>
+            </a:r>
+            <a:r>
+              <a:rPr sz="1250" b="1" i="0">
+                <a:solidFill>
+                  <a:srgbClr val="1C2736"/>
+                </a:solidFill>
+                <a:latin typeface="Calibri"/>
+              </a:rPr>
+              <a:t>recall@IoU.25 = 54%</a:t>
+            </a:r>
+            <a:r>
+              <a:rPr sz="1250" b="0" i="0">
+                <a:solidFill>
+                  <a:srgbClr val="1C2736"/>
+                </a:solidFill>
+                <a:latin typeface="Calibri"/>
+              </a:rPr>
+              <a:t> · </a:t>
+            </a:r>
+            <a:r>
+              <a:rPr sz="1250" b="1" i="0">
+                <a:solidFill>
+                  <a:srgbClr val="1C2736"/>
+                </a:solidFill>
+                <a:latin typeface="Calibri"/>
+              </a:rPr>
+              <a:t>False-positive = 1.5%</a:t>
+            </a:r>
+            <a:r>
+              <a:rPr sz="1250" b="0" i="0">
+                <a:solidFill>
+                  <a:srgbClr val="1C2736"/>
+                </a:solidFill>
+                <a:latin typeface="Calibri"/>
+              </a:rPr>
+              <a:t> (hiếm khi bịa box) · pIoU CI95 [0.19, 0.36].</a:t>
+            </a:r>
+          </a:p>
+          <a:p>
+            <a:pPr>
+              <a:spcBef>
+                <a:spcPts val="0"/>
+              </a:spcBef>
+              <a:spcAft>
+                <a:spcPts val="800"/>
+              </a:spcAft>
+            </a:pPr>
+            <a:r>
+              <a:rPr sz="1250" b="1" i="0">
+                <a:solidFill>
+                  <a:srgbClr val="1A3A5C"/>
+                </a:solidFill>
+                <a:latin typeface="Calibri"/>
+              </a:rPr>
+              <a:t>▪  </a:t>
+            </a:r>
+            <a:r>
+              <a:rPr sz="1250" b="1" i="0">
+                <a:solidFill>
+                  <a:srgbClr val="1C2736"/>
+                </a:solidFill>
+                <a:latin typeface="Calibri"/>
+              </a:rPr>
+              <a:t>Không quên:</a:t>
+            </a:r>
+            <a:r>
+              <a:rPr sz="1250" b="0" i="0">
+                <a:solidFill>
+                  <a:srgbClr val="1C2736"/>
+                </a:solidFill>
+                <a:latin typeface="Calibri"/>
+              </a:rPr>
+              <a:t> vẫn hội thoại / JSON / thơ / toán (LoRA giữ trọng số gốc).</a:t>
+            </a:r>
+          </a:p>
+          <a:p>
+            <a:pPr>
+              <a:spcBef>
+                <a:spcPts val="0"/>
+              </a:spcBef>
+              <a:spcAft>
+                <a:spcPts val="800"/>
+              </a:spcAft>
+            </a:pPr>
+            <a:r>
+              <a:rPr sz="1250" b="1" i="0">
+                <a:solidFill>
+                  <a:srgbClr val="1A3A5C"/>
+                </a:solidFill>
+                <a:latin typeface="Calibri"/>
+              </a:rPr>
+              <a:t>▪  </a:t>
+            </a:r>
+            <a:r>
+              <a:rPr sz="1250" b="0" i="0">
+                <a:solidFill>
+                  <a:srgbClr val="1C2736"/>
+                </a:solidFill>
+                <a:latin typeface="Calibri"/>
+              </a:rPr>
+              <a:t>Định vị ~0.27 ≈ </a:t>
+            </a:r>
+            <a:r>
+              <a:rPr sz="1250" b="1" i="0">
+                <a:solidFill>
+                  <a:srgbClr val="1C2736"/>
+                </a:solidFill>
+                <a:latin typeface="Calibri"/>
+              </a:rPr>
+              <a:t>cùng khoảng MedRegA (~0.23)</a:t>
+            </a:r>
+            <a:r>
+              <a:rPr sz="1250" b="0" i="0">
+                <a:solidFill>
+                  <a:srgbClr val="1C2736"/>
+                </a:solidFill>
+                <a:latin typeface="Calibri"/>
+              </a:rPr>
+              <a:t> dù model nhỏ 5× — khác dataset, chỉ tham khảo.</a:t>
+            </a:r>
+          </a:p>
+        </p:txBody>
+      </p:sp>
+      <p:sp>
+        <p:nvSpPr>
+          <p:cNvPr id="15" name="Rectangle 14"/>
+          <p:cNvSpPr/>
+          <p:nvPr/>
+        </p:nvSpPr>
+        <p:spPr>
+          <a:xfrm>
+            <a:off x="365760" y="4178808"/>
+            <a:ext cx="8412480" cy="548640"/>
+          </a:xfrm>
+          <a:prstGeom prst="rect">
+            <a:avLst/>
+          </a:prstGeom>
+          <a:solidFill>
+            <a:srgbClr val="FBF1F1"/>
+          </a:solidFill>
+          <a:ln>
+            <a:noFill/>
+          </a:ln>
+          <a:effectLst/>
+        </p:spPr>
+        <p:style>
+          <a:lnRef idx="1">
+            <a:schemeClr val="accent1"/>
+          </a:lnRef>
+          <a:fillRef idx="3">
+            <a:schemeClr val="accent1"/>
+          </a:fillRef>
+          <a:effectRef idx="2">
+            <a:schemeClr val="accent1"/>
+          </a:effectRef>
+          <a:fontRef idx="minor">
+            <a:schemeClr val="lt1"/>
+          </a:fontRef>
+        </p:style>
+        <p:txBody>
+          <a:bodyPr rtlCol="0" anchor="ctr"/>
+          <a:lstStyle/>
+          <a:p>
+            <a:pPr algn="ctr"/>
+          </a:p>
+        </p:txBody>
+      </p:sp>
+      <p:sp>
+        <p:nvSpPr>
+          <p:cNvPr id="16" name="TextBox 15"/>
+          <p:cNvSpPr txBox="1"/>
+          <p:nvPr/>
+        </p:nvSpPr>
+        <p:spPr>
+          <a:xfrm>
+            <a:off x="475488" y="4242816"/>
+            <a:ext cx="8193023" cy="420623"/>
+          </a:xfrm>
+          <a:prstGeom prst="rect">
+            <a:avLst/>
+          </a:prstGeom>
+          <a:noFill/>
+        </p:spPr>
+        <p:txBody>
+          <a:bodyPr wrap="square" anchor="t" lIns="25400" rIns="25400" tIns="12700" bIns="12700">
+            <a:spAutoFit/>
+          </a:bodyPr>
+          <a:lstStyle/>
+          <a:p>
+            <a:r>
+              <a:rPr sz="1050" b="1" i="0">
+                <a:solidFill>
+                  <a:srgbClr val="A04646"/>
+                </a:solidFill>
+                <a:latin typeface="Calibri"/>
+              </a:rPr>
+              <a:t>⚠ Lưu ý</a:t>
+            </a:r>
+          </a:p>
+          <a:p>
+            <a:pPr>
+              <a:spcBef>
+                <a:spcPts val="100"/>
+              </a:spcBef>
+            </a:pPr>
+            <a:r>
+              <a:rPr sz="1000" b="0" i="0">
+                <a:solidFill>
+                  <a:srgbClr val="1C2736"/>
+                </a:solidFill>
+                <a:latin typeface="Calibri"/>
+              </a:rPr>
+              <a:t>n nhỏ (~25 bn dương / 2 âm) → CI rộng; đây là PoC, không tuyên bố lâm sàng.</a:t>
+            </a:r>
+          </a:p>
+        </p:txBody>
+      </p:sp>
+      <p:sp>
+        <p:nvSpPr>
+          <p:cNvPr id="17" name="Rectangle 16"/>
+          <p:cNvSpPr/>
+          <p:nvPr/>
+        </p:nvSpPr>
+        <p:spPr>
+          <a:xfrm>
+            <a:off x="0" y="4882896"/>
+            <a:ext cx="9144000" cy="265176"/>
+          </a:xfrm>
+          <a:prstGeom prst="rect">
+            <a:avLst/>
+          </a:prstGeom>
+          <a:solidFill>
+            <a:srgbClr val="EEF4FB"/>
+          </a:solidFill>
+          <a:ln>
+            <a:noFill/>
+          </a:ln>
+          <a:effectLst/>
+        </p:spPr>
+        <p:style>
+          <a:lnRef idx="1">
+            <a:schemeClr val="accent1"/>
+          </a:lnRef>
+          <a:fillRef idx="3">
+            <a:schemeClr val="accent1"/>
+          </a:fillRef>
+          <a:effectRef idx="2">
+            <a:schemeClr val="accent1"/>
+          </a:effectRef>
+          <a:fontRef idx="minor">
+            <a:schemeClr val="lt1"/>
+          </a:fontRef>
+        </p:style>
+        <p:txBody>
+          <a:bodyPr rtlCol="0" anchor="ctr"/>
+          <a:lstStyle/>
+          <a:p>
+            <a:pPr algn="ctr"/>
+          </a:p>
+        </p:txBody>
+      </p:sp>
+      <p:sp>
+        <p:nvSpPr>
+          <p:cNvPr id="18" name="TextBox 17"/>
+          <p:cNvSpPr txBox="1"/>
+          <p:nvPr/>
+        </p:nvSpPr>
+        <p:spPr>
+          <a:xfrm>
+            <a:off x="320040" y="4937760"/>
+            <a:ext cx="6400800" cy="164592"/>
+          </a:xfrm>
+          <a:prstGeom prst="rect">
+            <a:avLst/>
+          </a:prstGeom>
+          <a:noFill/>
+        </p:spPr>
+        <p:txBody>
+          <a:bodyPr wrap="square" anchor="t" lIns="25400" rIns="25400" tIns="12700" bIns="12700">
+            <a:spAutoFit/>
+          </a:bodyPr>
+          <a:lstStyle/>
+          <a:p>
             <a:r>
               <a:rPr sz="850" b="0" i="0">
                 <a:solidFill>
@@ -4816,7 +4799,7 @@
       </p:sp>
       <p:sp>
         <p:nvSpPr>
-          <p:cNvPr id="12" name="TextBox 11"/>
+          <p:cNvPr id="19" name="TextBox 18"/>
           <p:cNvSpPr txBox="1"/>
           <p:nvPr/>
         </p:nvSpPr>
@@ -4876,7 +4859,7 @@
         <p:spPr>
           <a:xfrm>
             <a:off x="0" y="0"/>
-            <a:ext cx="9144000" cy="886968"/>
+            <a:ext cx="9144000" cy="1188720"/>
           </a:xfrm>
           <a:prstGeom prst="rect">
             <a:avLst/>
@@ -4919,7 +4902,7 @@
         </p:nvSpPr>
         <p:spPr>
           <a:xfrm>
-            <a:off x="320040" y="182880"/>
+            <a:off x="320040" y="109728"/>
             <a:ext cx="8503920" cy="548640"/>
           </a:xfrm>
           <a:prstGeom prst="rect">
@@ -4940,524 +4923,338 @@
                 </a:solidFill>
                 <a:latin typeface="Cambria"/>
               </a:rPr>
-              <a:t>Kết quả vs MedRegA</a:t>
-            </a:r>
-          </a:p>
-        </p:txBody>
-      </p:sp>
-      <p:graphicFrame>
-        <p:nvGraphicFramePr>
-          <p:cNvPr id="4" name="Table 3"/>
-          <p:cNvGraphicFramePr>
-            <a:graphicFrameLocks noGrp="1"/>
-          </p:cNvGraphicFramePr>
+              <a:t>Vì đâu có kết quả? — nhờ fine-tune</a:t>
+            </a:r>
+          </a:p>
+        </p:txBody>
+      </p:sp>
+      <p:sp>
+        <p:nvSpPr>
+          <p:cNvPr id="4" name="TextBox 3"/>
+          <p:cNvSpPr txBox="1"/>
           <p:nvPr/>
-        </p:nvGraphicFramePr>
-        <p:xfrm>
-          <a:off x="365760" y="1069848"/>
-          <a:ext cx="5486400" cy="2304288"/>
-        </p:xfrm>
-        <a:graphic>
-          <a:graphicData uri="http://schemas.openxmlformats.org/drawingml/2006/table">
-            <a:tbl>
-              <a:tblPr>
-                <a:tableStyleId>{5C22544A-7EE6-4342-B048-85BDC9FD1C3A}</a:tableStyleId>
-              </a:tblPr>
-              <a:tblGrid>
-                <a:gridCol w="1828800"/>
-                <a:gridCol w="1828800"/>
-                <a:gridCol w="1828800"/>
-              </a:tblGrid>
-              <a:tr h="329184">
-                <a:tc>
-                  <a:txBody>
-                    <a:bodyPr/>
-                    <a:lstStyle/>
-                    <a:p>
-                      <a:r>
-                        <a:rPr sz="1050" b="1" i="0">
-                          <a:solidFill>
-                            <a:srgbClr val="FFFFFF"/>
-                          </a:solidFill>
-                          <a:latin typeface="Calibri"/>
-                        </a:rPr>
-                        <a:t>Khía cạnh</a:t>
-                      </a:r>
-                    </a:p>
-                  </a:txBody>
-                  <a:tcPr anchor="ctr" marL="63500" marT="25400" marB="25400">
-                    <a:solidFill>
-                      <a:srgbClr val="1A3A5C"/>
-                    </a:solidFill>
-                  </a:tcPr>
-                </a:tc>
-                <a:tc>
-                  <a:txBody>
-                    <a:bodyPr/>
-                    <a:lstStyle/>
-                    <a:p>
-                      <a:r>
-                        <a:rPr sz="1050" b="1" i="0">
-                          <a:solidFill>
-                            <a:srgbClr val="FFFFFF"/>
-                          </a:solidFill>
-                          <a:latin typeface="Calibri"/>
-                        </a:rPr>
-                        <a:t>MedRegA</a:t>
-                      </a:r>
-                    </a:p>
-                  </a:txBody>
-                  <a:tcPr anchor="ctr" marL="63500" marT="25400" marB="25400">
-                    <a:solidFill>
-                      <a:srgbClr val="1A3A5C"/>
-                    </a:solidFill>
-                  </a:tcPr>
-                </a:tc>
-                <a:tc>
-                  <a:txBody>
-                    <a:bodyPr/>
-                    <a:lstStyle/>
-                    <a:p>
-                      <a:r>
-                        <a:rPr sz="1050" b="1" i="0">
-                          <a:solidFill>
-                            <a:srgbClr val="FFFFFF"/>
-                          </a:solidFill>
-                          <a:latin typeface="Calibri"/>
-                        </a:rPr>
-                        <a:t>Của mình</a:t>
-                      </a:r>
-                    </a:p>
-                  </a:txBody>
-                  <a:tcPr anchor="ctr" marL="63500" marT="25400" marB="25400">
-                    <a:solidFill>
-                      <a:srgbClr val="1A3A5C"/>
-                    </a:solidFill>
-                  </a:tcPr>
-                </a:tc>
-              </a:tr>
-              <a:tr h="329184">
-                <a:tc>
-                  <a:txBody>
-                    <a:bodyPr/>
-                    <a:lstStyle/>
-                    <a:p>
-                      <a:r>
-                        <a:rPr sz="1000" b="1" i="0">
-                          <a:solidFill>
-                            <a:srgbClr val="1C2736"/>
-                          </a:solidFill>
-                          <a:latin typeface="Calibri"/>
-                        </a:rPr>
-                        <a:t>Quy mô</a:t>
-                      </a:r>
-                    </a:p>
-                  </a:txBody>
-                  <a:tcPr anchor="ctr" marL="63500" marT="12700" marB="12700">
-                    <a:solidFill>
-                      <a:srgbClr val="FFFFFF"/>
-                    </a:solidFill>
-                  </a:tcPr>
-                </a:tc>
-                <a:tc>
-                  <a:txBody>
-                    <a:bodyPr/>
-                    <a:lstStyle/>
-                    <a:p>
-                      <a:r>
-                        <a:rPr sz="1000" b="0" i="0">
-                          <a:solidFill>
-                            <a:srgbClr val="1C2736"/>
-                          </a:solidFill>
-                          <a:latin typeface="Calibri"/>
-                        </a:rPr>
-                        <a:t>~40B, 16×H800</a:t>
-                      </a:r>
-                    </a:p>
-                  </a:txBody>
-                  <a:tcPr anchor="ctr" marL="63500" marT="12700" marB="12700">
-                    <a:solidFill>
-                      <a:srgbClr val="FFFFFF"/>
-                    </a:solidFill>
-                  </a:tcPr>
-                </a:tc>
-                <a:tc>
-                  <a:txBody>
-                    <a:bodyPr/>
-                    <a:lstStyle/>
-                    <a:p>
-                      <a:r>
-                        <a:rPr sz="1000" b="0" i="0">
-                          <a:solidFill>
-                            <a:srgbClr val="1C2736"/>
-                          </a:solidFill>
-                          <a:latin typeface="Calibri"/>
-                        </a:rPr>
-                        <a:t>~8B, 1 GPU</a:t>
-                      </a:r>
-                    </a:p>
-                  </a:txBody>
-                  <a:tcPr anchor="ctr" marL="63500" marT="12700" marB="12700">
-                    <a:solidFill>
-                      <a:srgbClr val="FFFFFF"/>
-                    </a:solidFill>
-                  </a:tcPr>
-                </a:tc>
-              </a:tr>
-              <a:tr h="329184">
-                <a:tc>
-                  <a:txBody>
-                    <a:bodyPr/>
-                    <a:lstStyle/>
-                    <a:p>
-                      <a:r>
-                        <a:rPr sz="1000" b="1" i="0">
-                          <a:solidFill>
-                            <a:srgbClr val="1C2736"/>
-                          </a:solidFill>
-                          <a:latin typeface="Calibri"/>
-                        </a:rPr>
-                        <a:t>Vào 3D</a:t>
-                      </a:r>
-                    </a:p>
-                  </a:txBody>
-                  <a:tcPr anchor="ctr" marL="63500" marT="12700" marB="12700">
-                    <a:solidFill>
-                      <a:srgbClr val="E8F0F8"/>
-                    </a:solidFill>
-                  </a:tcPr>
-                </a:tc>
-                <a:tc>
-                  <a:txBody>
-                    <a:bodyPr/>
-                    <a:lstStyle/>
-                    <a:p>
-                      <a:r>
-                        <a:rPr sz="1000" b="0" i="0">
-                          <a:solidFill>
-                            <a:srgbClr val="1C2736"/>
-                          </a:solidFill>
-                          <a:latin typeface="Calibri"/>
-                        </a:rPr>
-                        <a:t>1 lát trung tâm</a:t>
-                      </a:r>
-                    </a:p>
-                  </a:txBody>
-                  <a:tcPr anchor="ctr" marL="63500" marT="12700" marB="12700">
-                    <a:solidFill>
-                      <a:srgbClr val="E8F0F8"/>
-                    </a:solidFill>
-                  </a:tcPr>
-                </a:tc>
-                <a:tc>
-                  <a:txBody>
-                    <a:bodyPr/>
-                    <a:lstStyle/>
-                    <a:p>
-                      <a:r>
-                        <a:rPr sz="1000" b="0" i="0">
-                          <a:solidFill>
-                            <a:srgbClr val="1C2736"/>
-                          </a:solidFill>
-                          <a:latin typeface="Calibri"/>
-                        </a:rPr>
-                        <a:t>đa lát + ca âm</a:t>
-                      </a:r>
-                    </a:p>
-                  </a:txBody>
-                  <a:tcPr anchor="ctr" marL="63500" marT="12700" marB="12700">
-                    <a:solidFill>
-                      <a:srgbClr val="E8F0F8"/>
-                    </a:solidFill>
-                  </a:tcPr>
-                </a:tc>
-              </a:tr>
-              <a:tr h="329184">
-                <a:tc>
-                  <a:txBody>
-                    <a:bodyPr/>
-                    <a:lstStyle/>
-                    <a:p>
-                      <a:r>
-                        <a:rPr sz="1000" b="1" i="0">
-                          <a:solidFill>
-                            <a:srgbClr val="1C2736"/>
-                          </a:solidFill>
-                          <a:latin typeface="Calibri"/>
-                        </a:rPr>
-                        <a:t>Đơn vị đánh giá</a:t>
-                      </a:r>
-                    </a:p>
-                  </a:txBody>
-                  <a:tcPr anchor="ctr" marL="63500" marT="12700" marB="12700">
-                    <a:solidFill>
-                      <a:srgbClr val="FFFFFF"/>
-                    </a:solidFill>
-                  </a:tcPr>
-                </a:tc>
-                <a:tc>
-                  <a:txBody>
-                    <a:bodyPr/>
-                    <a:lstStyle/>
-                    <a:p>
-                      <a:r>
-                        <a:rPr sz="1000" b="0" i="0">
-                          <a:solidFill>
-                            <a:srgbClr val="1C2736"/>
-                          </a:solidFill>
-                          <a:latin typeface="Calibri"/>
-                        </a:rPr>
-                        <a:t>per-image</a:t>
-                      </a:r>
-                    </a:p>
-                  </a:txBody>
-                  <a:tcPr anchor="ctr" marL="63500" marT="12700" marB="12700">
-                    <a:solidFill>
-                      <a:srgbClr val="FFFFFF"/>
-                    </a:solidFill>
-                  </a:tcPr>
-                </a:tc>
-                <a:tc>
-                  <a:txBody>
-                    <a:bodyPr/>
-                    <a:lstStyle/>
-                    <a:p>
-                      <a:r>
-                        <a:rPr sz="1000" b="0" i="0">
-                          <a:solidFill>
-                            <a:srgbClr val="1C2736"/>
-                          </a:solidFill>
-                          <a:latin typeface="Calibri"/>
-                        </a:rPr>
-                        <a:t>per-patient + CI</a:t>
-                      </a:r>
-                    </a:p>
-                  </a:txBody>
-                  <a:tcPr anchor="ctr" marL="63500" marT="12700" marB="12700">
-                    <a:solidFill>
-                      <a:srgbClr val="FFFFFF"/>
-                    </a:solidFill>
-                  </a:tcPr>
-                </a:tc>
-              </a:tr>
-              <a:tr h="329184">
-                <a:tc>
-                  <a:txBody>
-                    <a:bodyPr/>
-                    <a:lstStyle/>
-                    <a:p>
-                      <a:r>
-                        <a:rPr sz="1000" b="1" i="0">
-                          <a:solidFill>
-                            <a:srgbClr val="1C2736"/>
-                          </a:solidFill>
-                          <a:latin typeface="Calibri"/>
-                        </a:rPr>
-                        <a:t>Detect vs Localize</a:t>
-                      </a:r>
-                    </a:p>
-                  </a:txBody>
-                  <a:tcPr anchor="ctr" marL="63500" marT="12700" marB="12700">
-                    <a:solidFill>
-                      <a:srgbClr val="E8F0F8"/>
-                    </a:solidFill>
-                  </a:tcPr>
-                </a:tc>
-                <a:tc>
-                  <a:txBody>
-                    <a:bodyPr/>
-                    <a:lstStyle/>
-                    <a:p>
-                      <a:r>
-                        <a:rPr sz="1000" b="0" i="0">
-                          <a:solidFill>
-                            <a:srgbClr val="1C2736"/>
-                          </a:solidFill>
-                          <a:latin typeface="Calibri"/>
-                        </a:rPr>
-                        <a:t>gộp</a:t>
-                      </a:r>
-                    </a:p>
-                  </a:txBody>
-                  <a:tcPr anchor="ctr" marL="63500" marT="12700" marB="12700">
-                    <a:solidFill>
-                      <a:srgbClr val="E8F0F8"/>
-                    </a:solidFill>
-                  </a:tcPr>
-                </a:tc>
-                <a:tc>
-                  <a:txBody>
-                    <a:bodyPr/>
-                    <a:lstStyle/>
-                    <a:p>
-                      <a:r>
-                        <a:rPr sz="1000" b="0" i="0">
-                          <a:solidFill>
-                            <a:srgbClr val="1C2736"/>
-                          </a:solidFill>
-                          <a:latin typeface="Calibri"/>
-                        </a:rPr>
-                        <a:t>tách riêng</a:t>
-                      </a:r>
-                    </a:p>
-                  </a:txBody>
-                  <a:tcPr anchor="ctr" marL="63500" marT="12700" marB="12700">
-                    <a:solidFill>
-                      <a:srgbClr val="E8F0F8"/>
-                    </a:solidFill>
-                  </a:tcPr>
-                </a:tc>
-              </a:tr>
-              <a:tr h="329184">
-                <a:tc>
-                  <a:txBody>
-                    <a:bodyPr/>
-                    <a:lstStyle/>
-                    <a:p>
-                      <a:r>
-                        <a:rPr sz="1000" b="1" i="0">
-                          <a:solidFill>
-                            <a:srgbClr val="1C2736"/>
-                          </a:solidFill>
-                          <a:latin typeface="Calibri"/>
-                        </a:rPr>
-                        <a:t>Ca âm / Bất định</a:t>
-                      </a:r>
-                    </a:p>
-                  </a:txBody>
-                  <a:tcPr anchor="ctr" marL="63500" marT="12700" marB="12700">
-                    <a:solidFill>
-                      <a:srgbClr val="FFFFFF"/>
-                    </a:solidFill>
-                  </a:tcPr>
-                </a:tc>
-                <a:tc>
-                  <a:txBody>
-                    <a:bodyPr/>
-                    <a:lstStyle/>
-                    <a:p>
-                      <a:r>
-                        <a:rPr sz="1000" b="0" i="0">
-                          <a:solidFill>
-                            <a:srgbClr val="1C2736"/>
-                          </a:solidFill>
-                          <a:latin typeface="Calibri"/>
-                        </a:rPr>
-                        <a:t>không</a:t>
-                      </a:r>
-                    </a:p>
-                  </a:txBody>
-                  <a:tcPr anchor="ctr" marL="63500" marT="12700" marB="12700">
-                    <a:solidFill>
-                      <a:srgbClr val="FFFFFF"/>
-                    </a:solidFill>
-                  </a:tcPr>
-                </a:tc>
-                <a:tc>
-                  <a:txBody>
-                    <a:bodyPr/>
-                    <a:lstStyle/>
-                    <a:p>
-                      <a:r>
-                        <a:rPr sz="1000" b="0" i="0">
-                          <a:solidFill>
-                            <a:srgbClr val="1C2736"/>
-                          </a:solidFill>
-                          <a:latin typeface="Calibri"/>
-                        </a:rPr>
-                        <a:t>FP + selective prediction</a:t>
-                      </a:r>
-                    </a:p>
-                  </a:txBody>
-                  <a:tcPr anchor="ctr" marL="63500" marT="12700" marB="12700">
-                    <a:solidFill>
-                      <a:srgbClr val="FFFFFF"/>
-                    </a:solidFill>
-                  </a:tcPr>
-                </a:tc>
-              </a:tr>
-              <a:tr h="329184">
-                <a:tc>
-                  <a:txBody>
-                    <a:bodyPr/>
-                    <a:lstStyle/>
-                    <a:p>
-                      <a:r>
-                        <a:rPr sz="1000" b="1" i="0">
-                          <a:solidFill>
-                            <a:srgbClr val="1C2736"/>
-                          </a:solidFill>
-                          <a:latin typeface="Calibri"/>
-                        </a:rPr>
-                        <a:t>Localization</a:t>
-                      </a:r>
-                    </a:p>
-                  </a:txBody>
-                  <a:tcPr anchor="ctr" marL="63500" marT="12700" marB="12700">
-                    <a:solidFill>
-                      <a:srgbClr val="E8F0F8"/>
-                    </a:solidFill>
-                  </a:tcPr>
-                </a:tc>
-                <a:tc>
-                  <a:txBody>
-                    <a:bodyPr/>
-                    <a:lstStyle/>
-                    <a:p>
-                      <a:r>
-                        <a:rPr sz="1000" b="0" i="0">
-                          <a:solidFill>
-                            <a:srgbClr val="1C2736"/>
-                          </a:solidFill>
-                          <a:latin typeface="Calibri"/>
-                        </a:rPr>
-                        <a:t>IoU ~0.23</a:t>
-                      </a:r>
-                    </a:p>
-                  </a:txBody>
-                  <a:tcPr anchor="ctr" marL="63500" marT="12700" marB="12700">
-                    <a:solidFill>
-                      <a:srgbClr val="E8F0F8"/>
-                    </a:solidFill>
-                  </a:tcPr>
-                </a:tc>
-                <a:tc>
-                  <a:txBody>
-                    <a:bodyPr/>
-                    <a:lstStyle/>
-                    <a:p>
-                      <a:r>
-                        <a:rPr sz="1000" b="0" i="0">
-                          <a:solidFill>
-                            <a:srgbClr val="1C2736"/>
-                          </a:solidFill>
-                          <a:latin typeface="Calibri"/>
-                        </a:rPr>
-                        <a:t>pIoU ~0.27</a:t>
-                      </a:r>
-                    </a:p>
-                  </a:txBody>
-                  <a:tcPr anchor="ctr" marL="63500" marT="12700" marB="12700">
-                    <a:solidFill>
-                      <a:srgbClr val="E8F0F8"/>
-                    </a:solidFill>
-                  </a:tcPr>
-                </a:tc>
-              </a:tr>
-            </a:tbl>
-          </a:graphicData>
-        </a:graphic>
-      </p:graphicFrame>
-      <p:sp>
-        <p:nvSpPr>
-          <p:cNvPr id="5" name="Rectangle 4"/>
+        </p:nvSpPr>
+        <p:spPr>
+          <a:xfrm>
+            <a:off x="338328" y="694944"/>
+            <a:ext cx="8412480" cy="411480"/>
+          </a:xfrm>
+          <a:prstGeom prst="rect">
+            <a:avLst/>
+          </a:prstGeom>
+          <a:noFill/>
+        </p:spPr>
+        <p:txBody>
+          <a:bodyPr wrap="square" anchor="t" lIns="25400" rIns="25400" tIns="12700" bIns="12700">
+            <a:spAutoFit/>
+          </a:bodyPr>
+          <a:lstStyle/>
+          <a:p>
+            <a:r>
+              <a:rPr sz="1150" b="0" i="1">
+                <a:solidFill>
+                  <a:srgbClr val="B8CFE0"/>
+                </a:solidFill>
+                <a:latin typeface="Calibri"/>
+              </a:rPr>
+              <a:t>Không chỉ đổi model: zero-shot (model mới, chưa train) → sau fine-tune</a:t>
+            </a:r>
+          </a:p>
+        </p:txBody>
+      </p:sp>
+      <p:sp>
+        <p:nvSpPr>
+          <p:cNvPr id="5" name="TextBox 4"/>
+          <p:cNvSpPr txBox="1"/>
+          <p:nvPr/>
+        </p:nvSpPr>
+        <p:spPr>
+          <a:xfrm>
+            <a:off x="365760" y="1417320"/>
+            <a:ext cx="5029200" cy="2743200"/>
+          </a:xfrm>
+          <a:prstGeom prst="rect">
+            <a:avLst/>
+          </a:prstGeom>
+          <a:noFill/>
+        </p:spPr>
+        <p:txBody>
+          <a:bodyPr wrap="square" anchor="t" lIns="25400" rIns="25400" tIns="12700" bIns="12700">
+            <a:spAutoFit/>
+          </a:bodyPr>
+          <a:lstStyle/>
+          <a:p>
+            <a:pPr>
+              <a:spcBef>
+                <a:spcPts val="0"/>
+              </a:spcBef>
+              <a:spcAft>
+                <a:spcPts val="1200"/>
+              </a:spcAft>
+            </a:pPr>
+            <a:r>
+              <a:rPr sz="1300" b="1" i="0">
+                <a:solidFill>
+                  <a:srgbClr val="1A3A5C"/>
+                </a:solidFill>
+                <a:latin typeface="Calibri"/>
+              </a:rPr>
+              <a:t>▪  </a:t>
+            </a:r>
+            <a:r>
+              <a:rPr sz="1300" b="1" i="0">
+                <a:solidFill>
+                  <a:srgbClr val="1C2736"/>
+                </a:solidFill>
+                <a:latin typeface="Calibri"/>
+              </a:rPr>
+              <a:t>Đổi model thôi KHÔNG đủ:</a:t>
+            </a:r>
+            <a:r>
+              <a:rPr sz="1300" b="0" i="0">
+                <a:solidFill>
+                  <a:srgbClr val="1C2736"/>
+                </a:solidFill>
+                <a:latin typeface="Calibri"/>
+              </a:rPr>
+              <a:t> Gemma zero-shot (chưa fine-tune) chỉ </a:t>
+            </a:r>
+            <a:r>
+              <a:rPr sz="1300" b="1" i="0">
+                <a:solidFill>
+                  <a:srgbClr val="1C2736"/>
+                </a:solidFill>
+                <a:latin typeface="Calibri"/>
+              </a:rPr>
+              <a:t>F1 0.33</a:t>
+            </a:r>
+            <a:r>
+              <a:rPr sz="1300" b="0" i="0">
+                <a:solidFill>
+                  <a:srgbClr val="1C2736"/>
+                </a:solidFill>
+                <a:latin typeface="Calibri"/>
+              </a:rPr>
+              <a:t>, gần như luôn trả “No tumor”.</a:t>
+            </a:r>
+          </a:p>
+          <a:p>
+            <a:pPr>
+              <a:spcBef>
+                <a:spcPts val="0"/>
+              </a:spcBef>
+              <a:spcAft>
+                <a:spcPts val="1200"/>
+              </a:spcAft>
+            </a:pPr>
+            <a:r>
+              <a:rPr sz="1300" b="1" i="0">
+                <a:solidFill>
+                  <a:srgbClr val="1A3A5C"/>
+                </a:solidFill>
+                <a:latin typeface="Calibri"/>
+              </a:rPr>
+              <a:t>▪  </a:t>
+            </a:r>
+            <a:r>
+              <a:rPr sz="1300" b="1" i="0">
+                <a:solidFill>
+                  <a:srgbClr val="1C2736"/>
+                </a:solidFill>
+                <a:latin typeface="Calibri"/>
+              </a:rPr>
+              <a:t>Fine-tune tạo ra năng lực:</a:t>
+            </a:r>
+            <a:r>
+              <a:rPr sz="1300" b="0" i="0">
+                <a:solidFill>
+                  <a:srgbClr val="1C2736"/>
+                </a:solidFill>
+                <a:latin typeface="Calibri"/>
+              </a:rPr>
+              <a:t> F1 0.33→</a:t>
+            </a:r>
+            <a:r>
+              <a:rPr sz="1300" b="1" i="0">
+                <a:solidFill>
+                  <a:srgbClr val="1C2736"/>
+                </a:solidFill>
+                <a:latin typeface="Calibri"/>
+              </a:rPr>
+              <a:t>0.89</a:t>
+            </a:r>
+            <a:r>
+              <a:rPr sz="1300" b="0" i="0">
+                <a:solidFill>
+                  <a:srgbClr val="1C2736"/>
+                </a:solidFill>
+                <a:latin typeface="Calibri"/>
+              </a:rPr>
+              <a:t>, recall 0→</a:t>
+            </a:r>
+            <a:r>
+              <a:rPr sz="1300" b="1" i="0">
+                <a:solidFill>
+                  <a:srgbClr val="1C2736"/>
+                </a:solidFill>
+                <a:latin typeface="Calibri"/>
+              </a:rPr>
+              <a:t>54%</a:t>
+            </a:r>
+            <a:r>
+              <a:rPr sz="1300" b="0" i="0">
+                <a:solidFill>
+                  <a:srgbClr val="1C2736"/>
+                </a:solidFill>
+                <a:latin typeface="Calibri"/>
+              </a:rPr>
+              <a:t>, pIoU 0.002→</a:t>
+            </a:r>
+            <a:r>
+              <a:rPr sz="1300" b="1" i="0">
+                <a:solidFill>
+                  <a:srgbClr val="1C2736"/>
+                </a:solidFill>
+                <a:latin typeface="Calibri"/>
+              </a:rPr>
+              <a:t>0.27</a:t>
+            </a:r>
+            <a:r>
+              <a:rPr sz="1300" b="0" i="0">
+                <a:solidFill>
+                  <a:srgbClr val="1C2736"/>
+                </a:solidFill>
+                <a:latin typeface="Calibri"/>
+              </a:rPr>
+              <a:t>.</a:t>
+            </a:r>
+          </a:p>
+          <a:p>
+            <a:pPr>
+              <a:spcBef>
+                <a:spcPts val="0"/>
+              </a:spcBef>
+              <a:spcAft>
+                <a:spcPts val="1200"/>
+              </a:spcAft>
+            </a:pPr>
+            <a:r>
+              <a:rPr sz="1300" b="1" i="0">
+                <a:solidFill>
+                  <a:srgbClr val="1A3A5C"/>
+                </a:solidFill>
+                <a:latin typeface="Calibri"/>
+              </a:rPr>
+              <a:t>▪  </a:t>
+            </a:r>
+            <a:r>
+              <a:rPr sz="1300" b="1" i="0">
+                <a:solidFill>
+                  <a:srgbClr val="1C2736"/>
+                </a:solidFill>
+                <a:latin typeface="Calibri"/>
+              </a:rPr>
+              <a:t>Bằng chứng thêm:</a:t>
+            </a:r>
+            <a:r>
+              <a:rPr sz="1300" b="0" i="0">
+                <a:solidFill>
+                  <a:srgbClr val="1C2736"/>
+                </a:solidFill>
+                <a:latin typeface="Calibri"/>
+              </a:rPr>
+              <a:t> đóng băng vision → pIoU 0.015; </a:t>
+            </a:r>
+            <a:r>
+              <a:rPr sz="1300" b="1" i="0">
+                <a:solidFill>
+                  <a:srgbClr val="1C2736"/>
+                </a:solidFill>
+                <a:latin typeface="Calibri"/>
+              </a:rPr>
+              <a:t>mở khoá + train → 0.27</a:t>
+            </a:r>
+            <a:r>
+              <a:rPr sz="1300" b="0" i="0">
+                <a:solidFill>
+                  <a:srgbClr val="1C2736"/>
+                </a:solidFill>
+                <a:latin typeface="Calibri"/>
+              </a:rPr>
+              <a:t> — cách train mới là mấu chốt.</a:t>
+            </a:r>
+          </a:p>
+        </p:txBody>
+      </p:sp>
+      <p:pic>
+        <p:nvPicPr>
+          <p:cNvPr id="6" name="Picture 5" descr="detect_before_after.png"/>
+          <p:cNvPicPr>
+            <a:picLocks noChangeAspect="1"/>
+          </p:cNvPicPr>
+          <p:nvPr/>
+        </p:nvPicPr>
+        <p:blipFill>
+          <a:blip r:embed="rId2"/>
+          <a:stretch>
+            <a:fillRect/>
+          </a:stretch>
+        </p:blipFill>
+        <p:spPr>
+          <a:xfrm>
+            <a:off x="5577840" y="1508760"/>
+            <a:ext cx="3383280" cy="1953725"/>
+          </a:xfrm>
+          <a:prstGeom prst="rect">
+            <a:avLst/>
+          </a:prstGeom>
+        </p:spPr>
+      </p:pic>
+      <p:sp>
+        <p:nvSpPr>
+          <p:cNvPr id="7" name="TextBox 6"/>
+          <p:cNvSpPr txBox="1"/>
+          <p:nvPr/>
+        </p:nvSpPr>
+        <p:spPr>
+          <a:xfrm>
+            <a:off x="5577840" y="3489916"/>
+            <a:ext cx="3383280" cy="274320"/>
+          </a:xfrm>
+          <a:prstGeom prst="rect">
+            <a:avLst/>
+          </a:prstGeom>
+          <a:noFill/>
+        </p:spPr>
+        <p:txBody>
+          <a:bodyPr wrap="square" anchor="t" lIns="25400" rIns="25400" tIns="12700" bIns="12700">
+            <a:spAutoFit/>
+          </a:bodyPr>
+          <a:lstStyle/>
+          <a:p>
+            <a:pPr algn="ctr"/>
+            <a:r>
+              <a:rPr sz="800" b="0" i="1">
+                <a:solidFill>
+                  <a:srgbClr val="6B7F95"/>
+                </a:solidFill>
+                <a:latin typeface="Calibri"/>
+              </a:rPr>
+              <a:t>Trước → sau fine-tune</a:t>
+            </a:r>
+          </a:p>
+        </p:txBody>
+      </p:sp>
+      <p:sp>
+        <p:nvSpPr>
+          <p:cNvPr id="8" name="Rectangle 7"/>
           <p:cNvSpPr/>
           <p:nvPr/>
         </p:nvSpPr>
         <p:spPr>
           <a:xfrm>
-            <a:off x="5989320" y="1115568"/>
-            <a:ext cx="2834640" cy="2194560"/>
+            <a:off x="365760" y="4069080"/>
+            <a:ext cx="5029200" cy="658368"/>
           </a:xfrm>
           <a:prstGeom prst="rect">
             <a:avLst/>
@@ -5494,14 +5291,14 @@
       </p:sp>
       <p:sp>
         <p:nvSpPr>
-          <p:cNvPr id="6" name="TextBox 5"/>
+          <p:cNvPr id="9" name="TextBox 8"/>
           <p:cNvSpPr txBox="1"/>
           <p:nvPr/>
         </p:nvSpPr>
         <p:spPr>
           <a:xfrm>
-            <a:off x="6099048" y="1179576"/>
-            <a:ext cx="2615184" cy="2066543"/>
+            <a:off x="475488" y="4133088"/>
+            <a:ext cx="4809744" cy="530352"/>
           </a:xfrm>
           <a:prstGeom prst="rect">
             <a:avLst/>
@@ -5521,7 +5318,7 @@
                 </a:solidFill>
                 <a:latin typeface="Calibri"/>
               </a:rPr>
-              <a:t>Đọc đúng cách</a:t>
+              <a:t>Chốt</a:t>
             </a:r>
           </a:p>
           <a:p>
@@ -5537,14 +5334,14 @@
                 </a:solidFill>
                 <a:latin typeface="Calibri"/>
               </a:rPr>
-              <a:t>KHÔNG so số trực tiếp (khác data/metric); pIoU có PHẠT nên khắt khe hơn. Đóng góp thật = khung đánh giá trung thực + độ tin cậy.</a:t>
-            </a:r>
-          </a:p>
-        </p:txBody>
-      </p:sp>
-      <p:sp>
-        <p:nvSpPr>
-          <p:cNvPr id="7" name="Rectangle 6"/>
+              <a:t>Kết quả đến từ FINE-TUNE (dữ liệu + mở vision + eval), không chỉ vì đổi sang model mới.</a:t>
+            </a:r>
+          </a:p>
+        </p:txBody>
+      </p:sp>
+      <p:sp>
+        <p:nvSpPr>
+          <p:cNvPr id="10" name="Rectangle 9"/>
           <p:cNvSpPr/>
           <p:nvPr/>
         </p:nvSpPr>
@@ -5588,7 +5385,7 @@
       </p:sp>
       <p:sp>
         <p:nvSpPr>
-          <p:cNvPr id="8" name="TextBox 7"/>
+          <p:cNvPr id="11" name="TextBox 10"/>
           <p:cNvSpPr txBox="1"/>
           <p:nvPr/>
         </p:nvSpPr>
@@ -5622,7 +5419,7 @@
       </p:sp>
       <p:sp>
         <p:nvSpPr>
-          <p:cNvPr id="9" name="TextBox 8"/>
+          <p:cNvPr id="12" name="TextBox 11"/>
           <p:cNvSpPr txBox="1"/>
           <p:nvPr/>
         </p:nvSpPr>

--- a/seminar/cai_tien/slides_5min_VN.pptx
+++ b/seminar/cai_tien/slides_5min_VN.pptx
@@ -8,8 +8,8 @@
     <p:sldId id="256" r:id="rId7"/>
     <p:sldId id="257" r:id="rId8"/>
     <p:sldId id="258" r:id="rId9"/>
-    <p:sldId id="259" r:id="rId10"/>
-    <p:sldId id="260" r:id="rId11"/>
+    <p:sldId id="259" r:id="rId11"/>
+    <p:sldId id="260" r:id="rId12"/>
   </p:sldIdLst>
   <p:sldSz cx="9144000" cy="5143500" type="screen4x3"/>
   <p:notesSz cx="6858000" cy="9144000"/>
@@ -109,6 +109,478 @@
     </a:lvl9pPr>
   </p:defaultTextStyle>
 </p:presentation>
+</file>
+
+<file path=ppt/notesMasters/notesMaster1.xml><?xml version="1.0" encoding="utf-8"?>
+<p:notesMaster xmlns:a="http://schemas.openxmlformats.org/drawingml/2006/main" xmlns:p="http://schemas.openxmlformats.org/presentationml/2006/main" xmlns:r="http://schemas.openxmlformats.org/officeDocument/2006/relationships">
+  <p:cSld>
+    <p:bg>
+      <p:bgRef idx="1001">
+        <a:schemeClr val="bg1"/>
+      </p:bgRef>
+    </p:bg>
+    <p:spTree>
+      <p:nvGrpSpPr>
+        <p:cNvPr id="1" name=""/>
+        <p:cNvGrpSpPr/>
+        <p:nvPr/>
+      </p:nvGrpSpPr>
+      <p:grpSpPr>
+        <a:xfrm>
+          <a:off x="0" y="0"/>
+          <a:ext cx="0" cy="0"/>
+          <a:chOff x="0" y="0"/>
+          <a:chExt cx="0" cy="0"/>
+        </a:xfrm>
+      </p:grpSpPr>
+      <p:sp>
+        <p:nvSpPr>
+          <p:cNvPr id="2" name="Header Placeholder 1"/>
+          <p:cNvSpPr>
+            <a:spLocks noGrp="1"/>
+          </p:cNvSpPr>
+          <p:nvPr>
+            <p:ph type="hdr" sz="quarter"/>
+          </p:nvPr>
+        </p:nvSpPr>
+        <p:spPr>
+          <a:xfrm>
+            <a:off x="0" y="0"/>
+            <a:ext cx="2971800" cy="457200"/>
+          </a:xfrm>
+          <a:prstGeom prst="rect">
+            <a:avLst/>
+          </a:prstGeom>
+        </p:spPr>
+        <p:txBody>
+          <a:bodyPr vert="horz" lIns="91440" tIns="45720" rIns="91440" bIns="45720" rtlCol="0"/>
+          <a:lstStyle>
+            <a:lvl1pPr algn="l">
+              <a:defRPr sz="1200"/>
+            </a:lvl1pPr>
+          </a:lstStyle>
+          <a:p>
+            <a:endParaRPr lang="en-US"/>
+          </a:p>
+        </p:txBody>
+      </p:sp>
+      <p:sp>
+        <p:nvSpPr>
+          <p:cNvPr id="3" name="Date Placeholder 2"/>
+          <p:cNvSpPr>
+            <a:spLocks noGrp="1"/>
+          </p:cNvSpPr>
+          <p:nvPr>
+            <p:ph type="dt" idx="1"/>
+          </p:nvPr>
+        </p:nvSpPr>
+        <p:spPr>
+          <a:xfrm>
+            <a:off x="3884613" y="0"/>
+            <a:ext cx="2971800" cy="457200"/>
+          </a:xfrm>
+          <a:prstGeom prst="rect">
+            <a:avLst/>
+          </a:prstGeom>
+        </p:spPr>
+        <p:txBody>
+          <a:bodyPr vert="horz" lIns="91440" tIns="45720" rIns="91440" bIns="45720" rtlCol="0"/>
+          <a:lstStyle>
+            <a:lvl1pPr algn="r">
+              <a:defRPr sz="1200"/>
+            </a:lvl1pPr>
+          </a:lstStyle>
+          <a:p>
+            <a:fld id="{0F89C1C7-3DCD-1040-A9CF-14679D8B5DDD}" type="datetimeFigureOut">
+              <a:rPr lang="en-US" smtClean="0"/>
+              <a:t>10/17/16</a:t>
+            </a:fld>
+            <a:endParaRPr lang="en-US"/>
+          </a:p>
+        </p:txBody>
+      </p:sp>
+      <p:sp>
+        <p:nvSpPr>
+          <p:cNvPr id="4" name="Slide Image Placeholder 3"/>
+          <p:cNvSpPr>
+            <a:spLocks noGrp="1" noRot="1" noChangeAspect="1"/>
+          </p:cNvSpPr>
+          <p:nvPr>
+            <p:ph type="sldImg" idx="2"/>
+          </p:nvPr>
+        </p:nvSpPr>
+        <p:spPr>
+          <a:xfrm>
+            <a:off x="1143000" y="685800"/>
+            <a:ext cx="4572000" cy="3429000"/>
+          </a:xfrm>
+          <a:prstGeom prst="rect">
+            <a:avLst/>
+          </a:prstGeom>
+          <a:noFill/>
+          <a:ln w="12700">
+            <a:solidFill>
+              <a:prstClr val="black"/>
+            </a:solidFill>
+          </a:ln>
+        </p:spPr>
+        <p:txBody>
+          <a:bodyPr vert="horz" lIns="91440" tIns="45720" rIns="91440" bIns="45720" rtlCol="0" anchor="ctr"/>
+          <a:lstStyle/>
+          <a:p>
+            <a:endParaRPr lang="en-US"/>
+          </a:p>
+        </p:txBody>
+      </p:sp>
+      <p:sp>
+        <p:nvSpPr>
+          <p:cNvPr id="5" name="Notes Placeholder 4"/>
+          <p:cNvSpPr>
+            <a:spLocks noGrp="1"/>
+          </p:cNvSpPr>
+          <p:nvPr>
+            <p:ph type="body" sz="quarter" idx="3"/>
+          </p:nvPr>
+        </p:nvSpPr>
+        <p:spPr>
+          <a:xfrm>
+            <a:off x="685800" y="4343400"/>
+            <a:ext cx="5486400" cy="4114800"/>
+          </a:xfrm>
+          <a:prstGeom prst="rect">
+            <a:avLst/>
+          </a:prstGeom>
+        </p:spPr>
+        <p:txBody>
+          <a:bodyPr vert="horz" lIns="91440" tIns="45720" rIns="91440" bIns="45720" rtlCol="0"/>
+          <a:lstStyle/>
+          <a:p>
+            <a:pPr lvl="0"/>
+            <a:r>
+              <a:rPr lang="en-US" smtClean="0"/>
+              <a:t>Click to edit Master text styles</a:t>
+            </a:r>
+          </a:p>
+          <a:p>
+            <a:pPr lvl="1"/>
+            <a:r>
+              <a:rPr lang="en-US" smtClean="0"/>
+              <a:t>Second level</a:t>
+            </a:r>
+          </a:p>
+          <a:p>
+            <a:pPr lvl="2"/>
+            <a:r>
+              <a:rPr lang="en-US" smtClean="0"/>
+              <a:t>Third level</a:t>
+            </a:r>
+          </a:p>
+          <a:p>
+            <a:pPr lvl="3"/>
+            <a:r>
+              <a:rPr lang="en-US" smtClean="0"/>
+              <a:t>Fourth level</a:t>
+            </a:r>
+          </a:p>
+          <a:p>
+            <a:pPr lvl="4"/>
+            <a:r>
+              <a:rPr lang="en-US" smtClean="0"/>
+              <a:t>Fifth level</a:t>
+            </a:r>
+            <a:endParaRPr lang="en-US"/>
+          </a:p>
+        </p:txBody>
+      </p:sp>
+      <p:sp>
+        <p:nvSpPr>
+          <p:cNvPr id="6" name="Footer Placeholder 5"/>
+          <p:cNvSpPr>
+            <a:spLocks noGrp="1"/>
+          </p:cNvSpPr>
+          <p:nvPr>
+            <p:ph type="ftr" sz="quarter" idx="4"/>
+          </p:nvPr>
+        </p:nvSpPr>
+        <p:spPr>
+          <a:xfrm>
+            <a:off x="0" y="8685213"/>
+            <a:ext cx="2971800" cy="457200"/>
+          </a:xfrm>
+          <a:prstGeom prst="rect">
+            <a:avLst/>
+          </a:prstGeom>
+        </p:spPr>
+        <p:txBody>
+          <a:bodyPr vert="horz" lIns="91440" tIns="45720" rIns="91440" bIns="45720" rtlCol="0" anchor="b"/>
+          <a:lstStyle>
+            <a:lvl1pPr algn="l">
+              <a:defRPr sz="1200"/>
+            </a:lvl1pPr>
+          </a:lstStyle>
+          <a:p>
+            <a:endParaRPr lang="en-US"/>
+          </a:p>
+        </p:txBody>
+      </p:sp>
+      <p:sp>
+        <p:nvSpPr>
+          <p:cNvPr id="7" name="Slide Number Placeholder 6"/>
+          <p:cNvSpPr>
+            <a:spLocks noGrp="1"/>
+          </p:cNvSpPr>
+          <p:nvPr>
+            <p:ph type="sldNum" sz="quarter" idx="5"/>
+          </p:nvPr>
+        </p:nvSpPr>
+        <p:spPr>
+          <a:xfrm>
+            <a:off x="3884613" y="8685213"/>
+            <a:ext cx="2971800" cy="457200"/>
+          </a:xfrm>
+          <a:prstGeom prst="rect">
+            <a:avLst/>
+          </a:prstGeom>
+        </p:spPr>
+        <p:txBody>
+          <a:bodyPr vert="horz" lIns="91440" tIns="45720" rIns="91440" bIns="45720" rtlCol="0" anchor="b"/>
+          <a:lstStyle>
+            <a:lvl1pPr algn="r">
+              <a:defRPr sz="1200"/>
+            </a:lvl1pPr>
+          </a:lstStyle>
+          <a:p>
+            <a:fld id="{BB5E49A5-4136-284D-997B-48E1D791AD67}" type="slidenum">
+              <a:rPr lang="en-US" smtClean="0"/>
+              <a:t>‹#›</a:t>
+            </a:fld>
+            <a:endParaRPr lang="en-US"/>
+          </a:p>
+        </p:txBody>
+      </p:sp>
+    </p:spTree>
+    <p:extLst>
+      <p:ext uri="{BB962C8B-B14F-4D97-AF65-F5344CB8AC3E}">
+        <p14:creationId xmlns:p14="http://schemas.microsoft.com/office/powerpoint/2010/main" val="2623252185"/>
+      </p:ext>
+    </p:extLst>
+  </p:cSld>
+  <p:clrMap bg1="lt1" tx1="dk1" bg2="lt2" tx2="dk2" accent1="accent1" accent2="accent2" accent3="accent3" accent4="accent4" accent5="accent5" accent6="accent6" hlink="hlink" folHlink="folHlink"/>
+  <p:notesStyle>
+    <a:lvl1pPr marL="0" algn="l" defTabSz="457200" rtl="0" eaLnBrk="1" latinLnBrk="0" hangingPunct="1">
+      <a:defRPr sz="1200" kern="1200">
+        <a:solidFill>
+          <a:schemeClr val="tx1"/>
+        </a:solidFill>
+        <a:latin typeface="+mn-lt"/>
+        <a:ea typeface="+mn-ea"/>
+        <a:cs typeface="+mn-cs"/>
+      </a:defRPr>
+    </a:lvl1pPr>
+    <a:lvl2pPr marL="457200" algn="l" defTabSz="457200" rtl="0" eaLnBrk="1" latinLnBrk="0" hangingPunct="1">
+      <a:defRPr sz="1200" kern="1200">
+        <a:solidFill>
+          <a:schemeClr val="tx1"/>
+        </a:solidFill>
+        <a:latin typeface="+mn-lt"/>
+        <a:ea typeface="+mn-ea"/>
+        <a:cs typeface="+mn-cs"/>
+      </a:defRPr>
+    </a:lvl2pPr>
+    <a:lvl3pPr marL="914400" algn="l" defTabSz="457200" rtl="0" eaLnBrk="1" latinLnBrk="0" hangingPunct="1">
+      <a:defRPr sz="1200" kern="1200">
+        <a:solidFill>
+          <a:schemeClr val="tx1"/>
+        </a:solidFill>
+        <a:latin typeface="+mn-lt"/>
+        <a:ea typeface="+mn-ea"/>
+        <a:cs typeface="+mn-cs"/>
+      </a:defRPr>
+    </a:lvl3pPr>
+    <a:lvl4pPr marL="1371600" algn="l" defTabSz="457200" rtl="0" eaLnBrk="1" latinLnBrk="0" hangingPunct="1">
+      <a:defRPr sz="1200" kern="1200">
+        <a:solidFill>
+          <a:schemeClr val="tx1"/>
+        </a:solidFill>
+        <a:latin typeface="+mn-lt"/>
+        <a:ea typeface="+mn-ea"/>
+        <a:cs typeface="+mn-cs"/>
+      </a:defRPr>
+    </a:lvl4pPr>
+    <a:lvl5pPr marL="1828800" algn="l" defTabSz="457200" rtl="0" eaLnBrk="1" latinLnBrk="0" hangingPunct="1">
+      <a:defRPr sz="1200" kern="1200">
+        <a:solidFill>
+          <a:schemeClr val="tx1"/>
+        </a:solidFill>
+        <a:latin typeface="+mn-lt"/>
+        <a:ea typeface="+mn-ea"/>
+        <a:cs typeface="+mn-cs"/>
+      </a:defRPr>
+    </a:lvl5pPr>
+    <a:lvl6pPr marL="2286000" algn="l" defTabSz="457200" rtl="0" eaLnBrk="1" latinLnBrk="0" hangingPunct="1">
+      <a:defRPr sz="1200" kern="1200">
+        <a:solidFill>
+          <a:schemeClr val="tx1"/>
+        </a:solidFill>
+        <a:latin typeface="+mn-lt"/>
+        <a:ea typeface="+mn-ea"/>
+        <a:cs typeface="+mn-cs"/>
+      </a:defRPr>
+    </a:lvl6pPr>
+    <a:lvl7pPr marL="2743200" algn="l" defTabSz="457200" rtl="0" eaLnBrk="1" latinLnBrk="0" hangingPunct="1">
+      <a:defRPr sz="1200" kern="1200">
+        <a:solidFill>
+          <a:schemeClr val="tx1"/>
+        </a:solidFill>
+        <a:latin typeface="+mn-lt"/>
+        <a:ea typeface="+mn-ea"/>
+        <a:cs typeface="+mn-cs"/>
+      </a:defRPr>
+    </a:lvl7pPr>
+    <a:lvl8pPr marL="3200400" algn="l" defTabSz="457200" rtl="0" eaLnBrk="1" latinLnBrk="0" hangingPunct="1">
+      <a:defRPr sz="1200" kern="1200">
+        <a:solidFill>
+          <a:schemeClr val="tx1"/>
+        </a:solidFill>
+        <a:latin typeface="+mn-lt"/>
+        <a:ea typeface="+mn-ea"/>
+        <a:cs typeface="+mn-cs"/>
+      </a:defRPr>
+    </a:lvl8pPr>
+    <a:lvl9pPr marL="3657600" algn="l" defTabSz="457200" rtl="0" eaLnBrk="1" latinLnBrk="0" hangingPunct="1">
+      <a:defRPr sz="1200" kern="1200">
+        <a:solidFill>
+          <a:schemeClr val="tx1"/>
+        </a:solidFill>
+        <a:latin typeface="+mn-lt"/>
+        <a:ea typeface="+mn-ea"/>
+        <a:cs typeface="+mn-cs"/>
+      </a:defRPr>
+    </a:lvl9pPr>
+  </p:notesStyle>
+</p:notesMaster>
+</file>
+
+<file path=ppt/notesSlides/notesSlide1.xml><?xml version="1.0" encoding="utf-8"?>
+<p:notes xmlns:a="http://schemas.openxmlformats.org/drawingml/2006/main" xmlns:p="http://schemas.openxmlformats.org/presentationml/2006/main" xmlns:r="http://schemas.openxmlformats.org/officeDocument/2006/relationships">
+  <p:cSld>
+    <p:spTree>
+      <p:nvGrpSpPr>
+        <p:cNvPr id="1" name=""/>
+        <p:cNvGrpSpPr/>
+        <p:nvPr/>
+      </p:nvGrpSpPr>
+      <p:grpSpPr>
+        <a:xfrm>
+          <a:off x="0" y="0"/>
+          <a:ext cx="0" cy="0"/>
+          <a:chOff x="0" y="0"/>
+          <a:chExt cx="0" cy="0"/>
+        </a:xfrm>
+      </p:grpSpPr>
+      <p:sp>
+        <p:nvSpPr>
+          <p:cNvPr id="2" name="Slide Image Placeholder 1"/>
+          <p:cNvSpPr>
+            <a:spLocks noGrp="1"/>
+          </p:cNvSpPr>
+          <p:nvPr>
+            <p:ph type="sldImg" idx="2"/>
+          </p:nvPr>
+        </p:nvSpPr>
+        <p:spPr/>
+      </p:sp>
+      <p:sp>
+        <p:nvSpPr>
+          <p:cNvPr id="3" name="Notes Placeholder 2"/>
+          <p:cNvSpPr>
+            <a:spLocks noGrp="1"/>
+          </p:cNvSpPr>
+          <p:nvPr>
+            <p:ph type="body" idx="3" sz="quarter"/>
+          </p:nvPr>
+        </p:nvSpPr>
+        <p:spPr/>
+        <p:txBody>
+          <a:bodyPr/>
+          <a:lstStyle/>
+          <a:p>
+            <a:r>
+              <a:t>GIẢI THÍCH METRIC (Presenter View):</a:t>
+            </a:r>
+          </a:p>
+          <a:p>
+            <a:r>
+              <a:t>• Detection F1 0.89 = cân bằng recall (bắt u) &amp; precision (không báo bừa); tính PER-PATIENT để không thổi phồng.</a:t>
+            </a:r>
+          </a:p>
+          <a:p>
+            <a:r>
+              <a:t>• Sensitivity 80% = bắt đúng 20/25 bệnh nhân có u (sót 5) — con số lâm sàng quan trọng nhất (sót u = nguy hiểm).</a:t>
+            </a:r>
+          </a:p>
+          <a:p>
+            <a:r>
+              <a:t>• Localization pIoU 0.27 = độ chồng lấn box (giao/hợp), CÓ PHẠT khi vẽ thừa/thiếu ổ → mức trung bình, chỗ còn yếu (khoanh được vùng nhưng chưa khít).</a:t>
+            </a:r>
+          </a:p>
+          <a:p>
+            <a:r>
+              <a:t>• recall@IoU.25 54% = 54% u được khoanh tạm trúng (chồng lấn ≥ 0.25).</a:t>
+            </a:r>
+          </a:p>
+          <a:p>
+            <a:r>
+              <a:t>• False-positive 1.5% = trên lát KHÔNG u, hiếm khi bịa box (điểm tốt).</a:t>
+            </a:r>
+          </a:p>
+          <a:p>
+            <a:r>
+              <a:t>• CI95 [0.19, 0.36] = khoảng tin cậy 95%, số dao động vì mẫu nhỏ (không phải số cứng).</a:t>
+            </a:r>
+          </a:p>
+          <a:p>
+            <a:r>
+              <a:t>• Không quên = nhờ LoRA giữ trọng số gốc → vẫn hội thoại / JSON / thơ / toán.</a:t>
+            </a:r>
+          </a:p>
+          <a:p>
+            <a:r>
+              <a:t>• ~0.27 vs MedRegA ~0.23 = cùng khoảng dù nhỏ 5×, KHÁC dataset nên chỉ tham khảo, KHÔNG claim hơn.</a:t>
+            </a:r>
+          </a:p>
+          <a:p>
+            <a:r>
+              <a:t>• Caveat: n nhỏ (25 dương / 2 âm), CI rộng, là PoC — không tuyên bố lâm sàng.</a:t>
+            </a:r>
+          </a:p>
+          <a:p/>
+          <a:p>
+            <a:r>
+              <a:t>CÂU NÓI (~40s): "Model đạt F1 0.89 ở phát hiện, độ nhạy 80% (20/25 bệnh nhân). Định vị pIoU 0.27 mới trung bình, chúng em không giấu. Điểm cộng: hiếm bịa u (FP 1.5%) và không quên nhờ LoRA. Định vị ngang MedRegA dù nhỏ 5× nhưng khác dữ liệu nên chỉ tham khảo. Đây là PoC, mẫu nhỏ nên còn hạn chế thống kê."</a:t>
+            </a:r>
+          </a:p>
+          <a:p/>
+        </p:txBody>
+      </p:sp>
+      <p:sp>
+        <p:nvSpPr>
+          <p:cNvPr id="4" name="Slide Number Placeholder 3"/>
+          <p:cNvSpPr>
+            <a:spLocks noGrp="1"/>
+          </p:cNvSpPr>
+          <p:nvPr>
+            <p:ph type="sldNum" idx="5" sz="quarter"/>
+          </p:nvPr>
+        </p:nvSpPr>
+        <p:spPr/>
+      </p:sp>
+    </p:spTree>
+  </p:cSld>
+  <p:clrMapOvr>
+    <a:masterClrMapping/>
+  </p:clrMapOvr>
+</p:notes>
 </file>
 
 <file path=ppt/slideLayouts/slideLayout1.xml><?xml version="1.0" encoding="utf-8"?>
@@ -6270,4 +6742,324 @@
   </a:objectDefaults>
   <a:extraClrSchemeLst/>
 </a:theme>
+</file>
+
+<file path=ppt/theme/theme2.xml><?xml version="1.0" encoding="utf-8"?>
+<a:theme xmlns:a="http://schemas.openxmlformats.org/drawingml/2006/main" name="Office Theme">
+  <a:themeElements>
+    <a:clrScheme name="Office">
+      <a:dk1>
+        <a:sysClr val="windowText" lastClr="000000"/>
+      </a:dk1>
+      <a:lt1>
+        <a:sysClr val="window" lastClr="FFFFFF"/>
+      </a:lt1>
+      <a:dk2>
+        <a:srgbClr val="1F497D"/>
+      </a:dk2>
+      <a:lt2>
+        <a:srgbClr val="EEECE1"/>
+      </a:lt2>
+      <a:accent1>
+        <a:srgbClr val="4F81BD"/>
+      </a:accent1>
+      <a:accent2>
+        <a:srgbClr val="C0504D"/>
+      </a:accent2>
+      <a:accent3>
+        <a:srgbClr val="9BBB59"/>
+      </a:accent3>
+      <a:accent4>
+        <a:srgbClr val="8064A2"/>
+      </a:accent4>
+      <a:accent5>
+        <a:srgbClr val="4BACC6"/>
+      </a:accent5>
+      <a:accent6>
+        <a:srgbClr val="F79646"/>
+      </a:accent6>
+      <a:hlink>
+        <a:srgbClr val="0000FF"/>
+      </a:hlink>
+      <a:folHlink>
+        <a:srgbClr val="800080"/>
+      </a:folHlink>
+    </a:clrScheme>
+    <a:fontScheme name="Office">
+      <a:majorFont>
+        <a:latin typeface="Calibri"/>
+        <a:ea typeface=""/>
+        <a:cs typeface=""/>
+        <a:font script="Jpan" typeface="ＭＳ Ｐゴシック"/>
+        <a:font script="Hang" typeface="맑은 고딕"/>
+        <a:font script="Hans" typeface="宋体"/>
+        <a:font script="Hant" typeface="新細明體"/>
+        <a:font script="Arab" typeface="Times New Roman"/>
+        <a:font script="Hebr" typeface="Times New Roman"/>
+        <a:font script="Thai" typeface="Angsana New"/>
+        <a:font script="Ethi" typeface="Nyala"/>
+        <a:font script="Beng" typeface="Vrinda"/>
+        <a:font script="Gujr" typeface="Shruti"/>
+        <a:font script="Khmr" typeface="MoolBoran"/>
+        <a:font script="Knda" typeface="Tunga"/>
+        <a:font script="Guru" typeface="Raavi"/>
+        <a:font script="Cans" typeface="Euphemia"/>
+        <a:font script="Cher" typeface="Plantagenet Cherokee"/>
+        <a:font script="Yiii" typeface="Microsoft Yi Baiti"/>
+        <a:font script="Tibt" typeface="Microsoft Himalaya"/>
+        <a:font script="Thaa" typeface="MV Boli"/>
+        <a:font script="Deva" typeface="Mangal"/>
+        <a:font script="Telu" typeface="Gautami"/>
+        <a:font script="Taml" typeface="Latha"/>
+        <a:font script="Syrc" typeface="Estrangelo Edessa"/>
+        <a:font script="Orya" typeface="Kalinga"/>
+        <a:font script="Mlym" typeface="Kartika"/>
+        <a:font script="Laoo" typeface="DokChampa"/>
+        <a:font script="Sinh" typeface="Iskoola Pota"/>
+        <a:font script="Mong" typeface="Mongolian Baiti"/>
+        <a:font script="Viet" typeface="Times New Roman"/>
+        <a:font script="Uigh" typeface="Microsoft Uighur"/>
+        <a:font script="Geor" typeface="Sylfaen"/>
+      </a:majorFont>
+      <a:minorFont>
+        <a:latin typeface="Calibri"/>
+        <a:ea typeface=""/>
+        <a:cs typeface=""/>
+        <a:font script="Jpan" typeface="ＭＳ Ｐゴシック"/>
+        <a:font script="Hang" typeface="맑은 고딕"/>
+        <a:font script="Hans" typeface="宋体"/>
+        <a:font script="Hant" typeface="新細明體"/>
+        <a:font script="Arab" typeface="Arial"/>
+        <a:font script="Hebr" typeface="Arial"/>
+        <a:font script="Thai" typeface="Cordia New"/>
+        <a:font script="Ethi" typeface="Nyala"/>
+        <a:font script="Beng" typeface="Vrinda"/>
+        <a:font script="Gujr" typeface="Shruti"/>
+        <a:font script="Khmr" typeface="DaunPenh"/>
+        <a:font script="Knda" typeface="Tunga"/>
+        <a:font script="Guru" typeface="Raavi"/>
+        <a:font script="Cans" typeface="Euphemia"/>
+        <a:font script="Cher" typeface="Plantagenet Cherokee"/>
+        <a:font script="Yiii" typeface="Microsoft Yi Baiti"/>
+        <a:font script="Tibt" typeface="Microsoft Himalaya"/>
+        <a:font script="Thaa" typeface="MV Boli"/>
+        <a:font script="Deva" typeface="Mangal"/>
+        <a:font script="Telu" typeface="Gautami"/>
+        <a:font script="Taml" typeface="Latha"/>
+        <a:font script="Syrc" typeface="Estrangelo Edessa"/>
+        <a:font script="Orya" typeface="Kalinga"/>
+        <a:font script="Mlym" typeface="Kartika"/>
+        <a:font script="Laoo" typeface="DokChampa"/>
+        <a:font script="Sinh" typeface="Iskoola Pota"/>
+        <a:font script="Mong" typeface="Mongolian Baiti"/>
+        <a:font script="Viet" typeface="Arial"/>
+        <a:font script="Uigh" typeface="Microsoft Uighur"/>
+        <a:font script="Geor" typeface="Sylfaen"/>
+      </a:minorFont>
+    </a:fontScheme>
+    <a:fmtScheme name="Office">
+      <a:fillStyleLst>
+        <a:solidFill>
+          <a:schemeClr val="phClr"/>
+        </a:solidFill>
+        <a:gradFill rotWithShape="1">
+          <a:gsLst>
+            <a:gs pos="0">
+              <a:schemeClr val="phClr">
+                <a:tint val="50000"/>
+                <a:satMod val="300000"/>
+              </a:schemeClr>
+            </a:gs>
+            <a:gs pos="35000">
+              <a:schemeClr val="phClr">
+                <a:tint val="37000"/>
+                <a:satMod val="300000"/>
+              </a:schemeClr>
+            </a:gs>
+            <a:gs pos="100000">
+              <a:schemeClr val="phClr">
+                <a:tint val="15000"/>
+                <a:satMod val="350000"/>
+              </a:schemeClr>
+            </a:gs>
+          </a:gsLst>
+          <a:lin ang="16200000" scaled="1"/>
+        </a:gradFill>
+        <a:gradFill rotWithShape="1">
+          <a:gsLst>
+            <a:gs pos="0">
+              <a:schemeClr val="phClr">
+                <a:tint val="100000"/>
+                <a:shade val="100000"/>
+                <a:satMod val="130000"/>
+              </a:schemeClr>
+            </a:gs>
+            <a:gs pos="100000">
+              <a:schemeClr val="phClr">
+                <a:tint val="50000"/>
+                <a:shade val="100000"/>
+                <a:satMod val="350000"/>
+              </a:schemeClr>
+            </a:gs>
+          </a:gsLst>
+          <a:lin ang="16200000" scaled="0"/>
+        </a:gradFill>
+      </a:fillStyleLst>
+      <a:lnStyleLst>
+        <a:ln w="9525" cap="flat" cmpd="sng" algn="ctr">
+          <a:solidFill>
+            <a:schemeClr val="phClr">
+              <a:shade val="95000"/>
+              <a:satMod val="105000"/>
+            </a:schemeClr>
+          </a:solidFill>
+          <a:prstDash val="solid"/>
+        </a:ln>
+        <a:ln w="25400" cap="flat" cmpd="sng" algn="ctr">
+          <a:solidFill>
+            <a:schemeClr val="phClr"/>
+          </a:solidFill>
+          <a:prstDash val="solid"/>
+        </a:ln>
+        <a:ln w="38100" cap="flat" cmpd="sng" algn="ctr">
+          <a:solidFill>
+            <a:schemeClr val="phClr"/>
+          </a:solidFill>
+          <a:prstDash val="solid"/>
+        </a:ln>
+      </a:lnStyleLst>
+      <a:effectStyleLst>
+        <a:effectStyle>
+          <a:effectLst>
+            <a:outerShdw blurRad="40000" dist="20000" dir="5400000" rotWithShape="0">
+              <a:srgbClr val="000000">
+                <a:alpha val="38000"/>
+              </a:srgbClr>
+            </a:outerShdw>
+          </a:effectLst>
+        </a:effectStyle>
+        <a:effectStyle>
+          <a:effectLst>
+            <a:outerShdw blurRad="40000" dist="23000" dir="5400000" rotWithShape="0">
+              <a:srgbClr val="000000">
+                <a:alpha val="35000"/>
+              </a:srgbClr>
+            </a:outerShdw>
+          </a:effectLst>
+        </a:effectStyle>
+        <a:effectStyle>
+          <a:effectLst>
+            <a:outerShdw blurRad="40000" dist="23000" dir="5400000" rotWithShape="0">
+              <a:srgbClr val="000000">
+                <a:alpha val="35000"/>
+              </a:srgbClr>
+            </a:outerShdw>
+          </a:effectLst>
+          <a:scene3d>
+            <a:camera prst="orthographicFront">
+              <a:rot lat="0" lon="0" rev="0"/>
+            </a:camera>
+            <a:lightRig rig="threePt" dir="t">
+              <a:rot lat="0" lon="0" rev="1200000"/>
+            </a:lightRig>
+          </a:scene3d>
+          <a:sp3d>
+            <a:bevelT w="63500" h="25400"/>
+          </a:sp3d>
+        </a:effectStyle>
+      </a:effectStyleLst>
+      <a:bgFillStyleLst>
+        <a:solidFill>
+          <a:schemeClr val="phClr"/>
+        </a:solidFill>
+        <a:gradFill rotWithShape="1">
+          <a:gsLst>
+            <a:gs pos="0">
+              <a:schemeClr val="phClr">
+                <a:tint val="40000"/>
+                <a:satMod val="350000"/>
+              </a:schemeClr>
+            </a:gs>
+            <a:gs pos="40000">
+              <a:schemeClr val="phClr">
+                <a:tint val="45000"/>
+                <a:shade val="99000"/>
+                <a:satMod val="350000"/>
+              </a:schemeClr>
+            </a:gs>
+            <a:gs pos="100000">
+              <a:schemeClr val="phClr">
+                <a:shade val="20000"/>
+                <a:satMod val="255000"/>
+              </a:schemeClr>
+            </a:gs>
+          </a:gsLst>
+          <a:path path="circle">
+            <a:fillToRect l="50000" t="-80000" r="50000" b="180000"/>
+          </a:path>
+        </a:gradFill>
+        <a:gradFill rotWithShape="1">
+          <a:gsLst>
+            <a:gs pos="0">
+              <a:schemeClr val="phClr">
+                <a:tint val="80000"/>
+                <a:satMod val="300000"/>
+              </a:schemeClr>
+            </a:gs>
+            <a:gs pos="100000">
+              <a:schemeClr val="phClr">
+                <a:shade val="30000"/>
+                <a:satMod val="200000"/>
+              </a:schemeClr>
+            </a:gs>
+          </a:gsLst>
+          <a:path path="circle">
+            <a:fillToRect l="50000" t="50000" r="50000" b="50000"/>
+          </a:path>
+        </a:gradFill>
+      </a:bgFillStyleLst>
+    </a:fmtScheme>
+  </a:themeElements>
+  <a:objectDefaults>
+    <a:spDef>
+      <a:spPr/>
+      <a:bodyPr/>
+      <a:lstStyle/>
+      <a:style>
+        <a:lnRef idx="1">
+          <a:schemeClr val="accent1"/>
+        </a:lnRef>
+        <a:fillRef idx="3">
+          <a:schemeClr val="accent1"/>
+        </a:fillRef>
+        <a:effectRef idx="2">
+          <a:schemeClr val="accent1"/>
+        </a:effectRef>
+        <a:fontRef idx="minor">
+          <a:schemeClr val="lt1"/>
+        </a:fontRef>
+      </a:style>
+    </a:spDef>
+    <a:lnDef>
+      <a:spPr/>
+      <a:bodyPr/>
+      <a:lstStyle/>
+      <a:style>
+        <a:lnRef idx="2">
+          <a:schemeClr val="accent1"/>
+        </a:lnRef>
+        <a:fillRef idx="0">
+          <a:schemeClr val="accent1"/>
+        </a:fillRef>
+        <a:effectRef idx="1">
+          <a:schemeClr val="accent1"/>
+        </a:effectRef>
+        <a:fontRef idx="minor">
+          <a:schemeClr val="tx1"/>
+        </a:fontRef>
+      </a:style>
+    </a:lnDef>
+  </a:objectDefaults>
+  <a:extraClrSchemeLst/>
+</a:theme>
 </file>
--- a/seminar/cai_tien/slides_5min_VN.pptx
+++ b/seminar/cai_tien/slides_5min_VN.pptx
@@ -546,7 +546,7 @@
           </a:p>
           <a:p>
             <a:r>
-              <a:t>• ~0.27 vs MedRegA ~0.23 = cùng khoảng dù nhỏ 5×, KHÁC dataset nên chỉ tham khảo, KHÔNG claim hơn.</a:t>
+              <a:t>• vs MedRegA (Q&amp;A): IoU 0.23 của họ tính MATCHED-ONLY (không phạt miss — Algorithm 1 Hungarian) + đích chủ yếu CẤU TRÚC LỚN + box LỎNG ("không cần khít", paper). Cùng chuẩn matched: mình ~0.32 &gt; 0.23. pIoU 0.27 của mình CÓ PHẠT nên khắt khe hơn. KHÔNG nói "mình hơn" (khác dataset). KHÔNG nói "họ gộp 1 box" — họ cũng multi-box (Figure 8).</a:t>
             </a:r>
           </a:p>
           <a:p>
@@ -4150,7 +4150,7 @@
                           </a:solidFill>
                           <a:latin typeface="Calibri"/>
                         </a:rPr>
-                        <a:t>, box gộp thô</a:t>
+                        <a:t> → không đo được model bịa box</a:t>
                       </a:r>
                     </a:p>
                   </a:txBody>
@@ -4172,7 +4172,7 @@
                           </a:solidFill>
                           <a:latin typeface="Calibri"/>
                         </a:rPr>
-                        <a:t>Đa lát + ca âm + multi-box</a:t>
+                        <a:t>Đa lát + ca âm</a:t>
                       </a:r>
                       <a:r>
                         <a:rPr sz="1150" b="0" i="0">
@@ -4181,7 +4181,7 @@
                           </a:solidFill>
                           <a:latin typeface="Calibri"/>
                         </a:rPr>
-                        <a:t> (tách từng ổ); split theo bệnh nhân</a:t>
+                        <a:t> (đo được false-positive); box khít từng ổ, split theo bệnh nhân</a:t>
                       </a:r>
                     </a:p>
                   </a:txBody>
@@ -5074,7 +5074,7 @@
                 </a:solidFill>
                 <a:latin typeface="Calibri"/>
               </a:rPr>
-              <a:t>Định vị ~0.27 ≈ </a:t>
+              <a:t>Định vị: cùng chuẩn (matched) mình </a:t>
             </a:r>
             <a:r>
               <a:rPr sz="1250" b="1" i="0">
@@ -5083,7 +5083,7 @@
                 </a:solidFill>
                 <a:latin typeface="Calibri"/>
               </a:rPr>
-              <a:t>cùng khoảng MedRegA (~0.23)</a:t>
+              <a:t>~0.32</a:t>
             </a:r>
             <a:r>
               <a:rPr sz="1250" b="0" i="0">
@@ -5092,7 +5092,25 @@
                 </a:solidFill>
                 <a:latin typeface="Calibri"/>
               </a:rPr>
-              <a:t> dù model nhỏ 5× — khác dataset, chỉ tham khảo.</a:t>
+              <a:t> vs MedRegA </a:t>
+            </a:r>
+            <a:r>
+              <a:rPr sz="1250" b="1" i="0">
+                <a:solidFill>
+                  <a:srgbClr val="1C2736"/>
+                </a:solidFill>
+                <a:latin typeface="Calibri"/>
+              </a:rPr>
+              <a:t>~0.23</a:t>
+            </a:r>
+            <a:r>
+              <a:rPr sz="1250" b="0" i="0">
+                <a:solidFill>
+                  <a:srgbClr val="1C2736"/>
+                </a:solidFill>
+                <a:latin typeface="Calibri"/>
+              </a:rPr>
+              <a:t>; pIoU CÓ PHẠT của mình 0.27 còn khắt khe hơn — đích họ lớn + box lỏng, khác dataset.</a:t>
             </a:r>
           </a:p>
         </p:txBody>

--- a/seminar/cai_tien/slides_5min_VN.pptx
+++ b/seminar/cai_tien/slides_5min_VN.pptx
@@ -5678,7 +5678,7 @@
       </p:sp>
       <p:pic>
         <p:nvPicPr>
-          <p:cNvPr id="6" name="Picture 5" descr="detect_before_after.png"/>
+          <p:cNvPr id="6" name="Picture 5" descr="before_after_qual_vn.png"/>
           <p:cNvPicPr>
             <a:picLocks noChangeAspect="1"/>
           </p:cNvPicPr>
@@ -5692,8 +5692,8 @@
         </p:blipFill>
         <p:spPr>
           <a:xfrm>
-            <a:off x="5577840" y="1508760"/>
-            <a:ext cx="3383280" cy="1953725"/>
+            <a:off x="5394960" y="1828800"/>
+            <a:ext cx="3611880" cy="2165277"/>
           </a:xfrm>
           <a:prstGeom prst="rect">
             <a:avLst/>
@@ -5708,8 +5708,8 @@
         </p:nvSpPr>
         <p:spPr>
           <a:xfrm>
-            <a:off x="5577840" y="3489916"/>
-            <a:ext cx="3383280" cy="274320"/>
+            <a:off x="5394960" y="4021509"/>
+            <a:ext cx="3611880" cy="274320"/>
           </a:xfrm>
           <a:prstGeom prst="rect">
             <a:avLst/>
@@ -5730,7 +5730,7 @@
                 </a:solidFill>
                 <a:latin typeface="Calibri"/>
               </a:rPr>
-              <a:t>Trước → sau fine-tune</a:t>
+              <a:t>Cùng 1 ca: trước → sau fine-tune</a:t>
             </a:r>
           </a:p>
         </p:txBody>
@@ -5969,7 +5969,7 @@
         <p:spPr>
           <a:xfrm>
             <a:off x="0" y="0"/>
-            <a:ext cx="9144000" cy="886968"/>
+            <a:ext cx="9144000" cy="1188720"/>
           </a:xfrm>
           <a:prstGeom prst="rect">
             <a:avLst/>
@@ -6012,7 +6012,7 @@
         </p:nvSpPr>
         <p:spPr>
           <a:xfrm>
-            <a:off x="320040" y="182880"/>
+            <a:off x="320040" y="109728"/>
             <a:ext cx="8503920" cy="548640"/>
           </a:xfrm>
           <a:prstGeom prst="rect">
@@ -6033,7 +6033,7 @@
                 </a:solidFill>
                 <a:latin typeface="Cambria"/>
               </a:rPr>
-              <a:t>Kết luận</a:t>
+              <a:t>Hướng tương lai</a:t>
             </a:r>
           </a:p>
         </p:txBody>
@@ -6046,8 +6046,42 @@
         </p:nvSpPr>
         <p:spPr>
           <a:xfrm>
-            <a:off x="365760" y="1115568"/>
-            <a:ext cx="8412480" cy="2743200"/>
+            <a:off x="338328" y="694944"/>
+            <a:ext cx="8412480" cy="411480"/>
+          </a:xfrm>
+          <a:prstGeom prst="rect">
+            <a:avLst/>
+          </a:prstGeom>
+          <a:noFill/>
+        </p:spPr>
+        <p:txBody>
+          <a:bodyPr wrap="square" anchor="t" lIns="25400" rIns="25400" tIns="12700" bIns="12700">
+            <a:spAutoFit/>
+          </a:bodyPr>
+          <a:lstStyle/>
+          <a:p>
+            <a:r>
+              <a:rPr sz="1150" b="0" i="1">
+                <a:solidFill>
+                  <a:srgbClr val="B8CFE0"/>
+                </a:solidFill>
+                <a:latin typeface="Calibri"/>
+              </a:rPr>
+              <a:t>Mỗi hướng nhắm vá một hạn chế đã thấy</a:t>
+            </a:r>
+          </a:p>
+        </p:txBody>
+      </p:sp>
+      <p:sp>
+        <p:nvSpPr>
+          <p:cNvPr id="5" name="TextBox 4"/>
+          <p:cNvSpPr txBox="1"/>
+          <p:nvPr/>
+        </p:nvSpPr>
+        <p:spPr>
+          <a:xfrm>
+            <a:off x="365760" y="1463039"/>
+            <a:ext cx="8412480" cy="2651760"/>
           </a:xfrm>
           <a:prstGeom prst="rect">
             <a:avLst/>
@@ -6065,11 +6099,11 @@
                 <a:spcPts val="0"/>
               </a:spcBef>
               <a:spcAft>
-                <a:spcPts val="1300"/>
+                <a:spcPts val="1200"/>
               </a:spcAft>
             </a:pPr>
             <a:r>
-              <a:rPr sz="1500" b="1" i="0">
+              <a:rPr sz="1350" b="1" i="0">
                 <a:solidFill>
                   <a:srgbClr val="1A3A5C"/>
                 </a:solidFill>
@@ -6078,40 +6112,49 @@
               <a:t>▪  </a:t>
             </a:r>
             <a:r>
-              <a:rPr sz="1500" b="1" i="0">
+              <a:rPr sz="1350" b="0" i="0">
                 <a:solidFill>
                   <a:srgbClr val="1C2736"/>
                 </a:solidFill>
                 <a:latin typeface="Calibri"/>
               </a:rPr>
-              <a:t>Chứng minh cơ chế:</a:t>
-            </a:r>
-            <a:r>
-              <a:rPr sz="1500" b="0" i="0">
+              <a:t>Sót u đồng tỉ trọng (cửa sổ CT rộng) → </a:t>
+            </a:r>
+            <a:r>
+              <a:rPr sz="1350" b="1" i="0">
                 <a:solidFill>
                   <a:srgbClr val="1C2736"/>
                 </a:solidFill>
                 <a:latin typeface="Calibri"/>
               </a:rPr>
-              <a:t> region-centric (khoanh-rồi-đọc) khả thi ở </a:t>
-            </a:r>
-            <a:r>
-              <a:rPr sz="1500" b="1" i="0">
+              <a:t>multi-window</a:t>
+            </a:r>
+            <a:r>
+              <a:rPr sz="1350" b="0" i="0">
                 <a:solidFill>
                   <a:srgbClr val="1C2736"/>
                 </a:solidFill>
                 <a:latin typeface="Calibri"/>
               </a:rPr>
-              <a:t>~8B, 1 GPU</a:t>
-            </a:r>
-            <a:r>
-              <a:rPr sz="1500" b="0" i="0">
+              <a:t> (cửa sổ gan hẹp) + </a:t>
+            </a:r>
+            <a:r>
+              <a:rPr sz="1350" b="1" i="0">
                 <a:solidFill>
                   <a:srgbClr val="1C2736"/>
                 </a:solidFill>
                 <a:latin typeface="Calibri"/>
               </a:rPr>
-              <a:t>.</a:t>
+              <a:t>2.5D</a:t>
+            </a:r>
+            <a:r>
+              <a:rPr sz="1350" b="0" i="0">
+                <a:solidFill>
+                  <a:srgbClr val="1C2736"/>
+                </a:solidFill>
+                <a:latin typeface="Calibri"/>
+              </a:rPr>
+              <a:t> đưa lại ngữ cảnh 3D.</a:t>
             </a:r>
           </a:p>
           <a:p>
@@ -6120,11 +6163,11 @@
                 <a:spcPts val="0"/>
               </a:spcBef>
               <a:spcAft>
-                <a:spcPts val="1300"/>
+                <a:spcPts val="1200"/>
               </a:spcAft>
             </a:pPr>
             <a:r>
-              <a:rPr sz="1500" b="1" i="0">
+              <a:rPr sz="1350" b="1" i="0">
                 <a:solidFill>
                   <a:srgbClr val="1A3A5C"/>
                 </a:solidFill>
@@ -6133,22 +6176,49 @@
               <a:t>▪  </a:t>
             </a:r>
             <a:r>
-              <a:rPr sz="1500" b="1" i="0">
+              <a:rPr sz="1350" b="0" i="0">
                 <a:solidFill>
                   <a:srgbClr val="1C2736"/>
                 </a:solidFill>
                 <a:latin typeface="Calibri"/>
               </a:rPr>
-              <a:t>Giá trị:</a:t>
-            </a:r>
-            <a:r>
-              <a:rPr sz="1500" b="0" i="0">
+              <a:t>Định vị còn thô (pIoU 0.27) → segmenter chuyên (</a:t>
+            </a:r>
+            <a:r>
+              <a:rPr sz="1350" b="1" i="0">
                 <a:solidFill>
                   <a:srgbClr val="1C2736"/>
                 </a:solidFill>
                 <a:latin typeface="Calibri"/>
               </a:rPr>
-              <a:t> khung đánh giá trung thực + selective prediction — không phải điểm số.</a:t>
+              <a:t>MedSAM</a:t>
+            </a:r>
+            <a:r>
+              <a:rPr sz="1350" b="0" i="0">
+                <a:solidFill>
+                  <a:srgbClr val="1C2736"/>
+                </a:solidFill>
+                <a:latin typeface="Calibri"/>
+              </a:rPr>
+              <a:t>) hoặc </a:t>
+            </a:r>
+            <a:r>
+              <a:rPr sz="1350" b="1" i="0">
+                <a:solidFill>
+                  <a:srgbClr val="1C2736"/>
+                </a:solidFill>
+                <a:latin typeface="Calibri"/>
+              </a:rPr>
+              <a:t>polygon</a:t>
+            </a:r>
+            <a:r>
+              <a:rPr sz="1350" b="0" i="0">
+                <a:solidFill>
+                  <a:srgbClr val="1C2736"/>
+                </a:solidFill>
+                <a:latin typeface="Calibri"/>
+              </a:rPr>
+              <a:t> để khoanh khít hơn.</a:t>
             </a:r>
           </a:p>
           <a:p>
@@ -6157,11 +6227,11 @@
                 <a:spcPts val="0"/>
               </a:spcBef>
               <a:spcAft>
-                <a:spcPts val="1300"/>
+                <a:spcPts val="1200"/>
               </a:spcAft>
             </a:pPr>
             <a:r>
-              <a:rPr sz="1500" b="1" i="0">
+              <a:rPr sz="1350" b="1" i="0">
                 <a:solidFill>
                   <a:srgbClr val="1A3A5C"/>
                 </a:solidFill>
@@ -6170,22 +6240,49 @@
               <a:t>▪  </a:t>
             </a:r>
             <a:r>
-              <a:rPr sz="1500" b="1" i="0">
+              <a:rPr sz="1350" b="0" i="0">
                 <a:solidFill>
                   <a:srgbClr val="1C2736"/>
                 </a:solidFill>
                 <a:latin typeface="Calibri"/>
               </a:rPr>
-              <a:t>Trung thực:</a:t>
-            </a:r>
-            <a:r>
-              <a:rPr sz="1500" b="0" i="0">
+              <a:t>Mẫu nhỏ, một bộ dữ liệu → </a:t>
+            </a:r>
+            <a:r>
+              <a:rPr sz="1350" b="1" i="0">
                 <a:solidFill>
                   <a:srgbClr val="1C2736"/>
                 </a:solidFill>
                 <a:latin typeface="Calibri"/>
               </a:rPr>
-              <a:t> PoC trên 1 dataset / 1 task, n nhỏ, CI rộng.</a:t>
+              <a:t>external validation</a:t>
+            </a:r>
+            <a:r>
+              <a:rPr sz="1350" b="0" i="0">
+                <a:solidFill>
+                  <a:srgbClr val="1C2736"/>
+                </a:solidFill>
+                <a:latin typeface="Calibri"/>
+              </a:rPr>
+              <a:t> (bộ khác) + </a:t>
+            </a:r>
+            <a:r>
+              <a:rPr sz="1350" b="1" i="0">
+                <a:solidFill>
+                  <a:srgbClr val="1C2736"/>
+                </a:solidFill>
+                <a:latin typeface="Calibri"/>
+              </a:rPr>
+              <a:t>calibration</a:t>
+            </a:r>
+            <a:r>
+              <a:rPr sz="1350" b="0" i="0">
+                <a:solidFill>
+                  <a:srgbClr val="1C2736"/>
+                </a:solidFill>
+                <a:latin typeface="Calibri"/>
+              </a:rPr>
+              <a:t> tăng độ tin cậy.</a:t>
             </a:r>
           </a:p>
           <a:p>
@@ -6194,11 +6291,11 @@
                 <a:spcPts val="0"/>
               </a:spcBef>
               <a:spcAft>
-                <a:spcPts val="1300"/>
+                <a:spcPts val="1200"/>
               </a:spcAft>
             </a:pPr>
             <a:r>
-              <a:rPr sz="1500" b="1" i="0">
+              <a:rPr sz="1350" b="1" i="0">
                 <a:solidFill>
                   <a:srgbClr val="1A3A5C"/>
                 </a:solidFill>
@@ -6207,35 +6304,62 @@
               <a:t>▪  </a:t>
             </a:r>
             <a:r>
-              <a:rPr sz="1500" b="1" i="0">
+              <a:rPr sz="1350" b="0" i="0">
                 <a:solidFill>
                   <a:srgbClr val="1C2736"/>
                 </a:solidFill>
                 <a:latin typeface="Calibri"/>
               </a:rPr>
-              <a:t>Tương lai:</a:t>
-            </a:r>
-            <a:r>
-              <a:rPr sz="1500" b="0" i="0">
+              <a:t>Mới ở mức phát hiện → </a:t>
+            </a:r>
+            <a:r>
+              <a:rPr sz="1350" b="1" i="0">
                 <a:solidFill>
                   <a:srgbClr val="1C2736"/>
                 </a:solidFill>
                 <a:latin typeface="Calibri"/>
               </a:rPr>
-              <a:t> ảnh giàu hơn (multi-window, 2.5D) + external validation.</a:t>
-            </a:r>
-          </a:p>
-        </p:txBody>
-      </p:sp>
-      <p:sp>
-        <p:nvSpPr>
-          <p:cNvPr id="5" name="Rectangle 4"/>
+              <a:t>grounded report</a:t>
+            </a:r>
+            <a:r>
+              <a:rPr sz="1350" b="0" i="0">
+                <a:solidFill>
+                  <a:srgbClr val="1C2736"/>
+                </a:solidFill>
+                <a:latin typeface="Calibri"/>
+              </a:rPr>
+              <a:t> (báo cáo có dẫn chứng) và mở rộng </a:t>
+            </a:r>
+            <a:r>
+              <a:rPr sz="1350" b="1" i="0">
+                <a:solidFill>
+                  <a:srgbClr val="1C2736"/>
+                </a:solidFill>
+                <a:latin typeface="Calibri"/>
+              </a:rPr>
+              <a:t>đa cơ quan</a:t>
+            </a:r>
+            <a:r>
+              <a:rPr sz="1350" b="0" i="0">
+                <a:solidFill>
+                  <a:srgbClr val="1C2736"/>
+                </a:solidFill>
+                <a:latin typeface="Calibri"/>
+              </a:rPr>
+              <a:t>.</a:t>
+            </a:r>
+          </a:p>
+        </p:txBody>
+      </p:sp>
+      <p:sp>
+        <p:nvSpPr>
+          <p:cNvPr id="6" name="Rectangle 5"/>
           <p:cNvSpPr/>
           <p:nvPr/>
         </p:nvSpPr>
         <p:spPr>
           <a:xfrm>
-            <a:off x="365760" y="3813048"/>
+            <a:off x="365760" y="4114800"/>
             <a:ext cx="8412480" cy="548640"/>
           </a:xfrm>
           <a:prstGeom prst="rect">
@@ -6273,13 +6397,13 @@
       </p:sp>
       <p:sp>
         <p:nvSpPr>
-          <p:cNvPr id="6" name="TextBox 5"/>
+          <p:cNvPr id="7" name="TextBox 6"/>
           <p:cNvSpPr txBox="1"/>
           <p:nvPr/>
         </p:nvSpPr>
         <p:spPr>
           <a:xfrm>
-            <a:off x="475488" y="3877056"/>
+            <a:off x="475488" y="4178808"/>
             <a:ext cx="8193023" cy="420623"/>
           </a:xfrm>
           <a:prstGeom prst="rect">
@@ -6300,7 +6424,7 @@
                 </a:solidFill>
                 <a:latin typeface="Calibri"/>
               </a:rPr>
-              <a:t>Câu chốt</a:t>
+              <a:t>Tổng kết</a:t>
             </a:r>
           </a:p>
           <a:p>
@@ -6316,14 +6440,14 @@
                 </a:solidFill>
                 <a:latin typeface="Calibri"/>
               </a:rPr>
-              <a:t>Không hứa đã tới đích — chỉ ra con đường và nói rõ chỗ nào còn dốc.</a:t>
-            </a:r>
-          </a:p>
-        </p:txBody>
-      </p:sp>
-      <p:sp>
-        <p:nvSpPr>
-          <p:cNvPr id="7" name="Rectangle 6"/>
+              <a:t>Không hứa đã tới đích — công trình chỉ ra con đường và những chỗ còn dốc.</a:t>
+            </a:r>
+          </a:p>
+        </p:txBody>
+      </p:sp>
+      <p:sp>
+        <p:nvSpPr>
+          <p:cNvPr id="8" name="Rectangle 7"/>
           <p:cNvSpPr/>
           <p:nvPr/>
         </p:nvSpPr>
@@ -6367,7 +6491,7 @@
       </p:sp>
       <p:sp>
         <p:nvSpPr>
-          <p:cNvPr id="8" name="TextBox 7"/>
+          <p:cNvPr id="9" name="TextBox 8"/>
           <p:cNvSpPr txBox="1"/>
           <p:nvPr/>
         </p:nvSpPr>
@@ -6401,7 +6525,7 @@
       </p:sp>
       <p:sp>
         <p:nvSpPr>
-          <p:cNvPr id="9" name="TextBox 8"/>
+          <p:cNvPr id="10" name="TextBox 9"/>
           <p:cNvSpPr txBox="1"/>
           <p:nvPr/>
         </p:nvSpPr>

--- a/seminar/cai_tien/slides_5min_VN.pptx
+++ b/seminar/cai_tien/slides_5min_VN.pptx
@@ -6081,7 +6081,7 @@
         <p:spPr>
           <a:xfrm>
             <a:off x="365760" y="1463039"/>
-            <a:ext cx="8412480" cy="2651760"/>
+            <a:ext cx="8412480" cy="2743200"/>
           </a:xfrm>
           <a:prstGeom prst="rect">
             <a:avLst/>
@@ -6099,11 +6099,11 @@
                 <a:spcPts val="0"/>
               </a:spcBef>
               <a:spcAft>
-                <a:spcPts val="1200"/>
+                <a:spcPts val="1100"/>
               </a:spcAft>
             </a:pPr>
             <a:r>
-              <a:rPr sz="1350" b="1" i="0">
+              <a:rPr sz="1300" b="1" i="0">
                 <a:solidFill>
                   <a:srgbClr val="1A3A5C"/>
                 </a:solidFill>
@@ -6112,49 +6112,40 @@
               <a:t>▪  </a:t>
             </a:r>
             <a:r>
-              <a:rPr sz="1350" b="0" i="0">
+              <a:rPr sz="1300" b="1" i="0">
                 <a:solidFill>
                   <a:srgbClr val="1C2736"/>
                 </a:solidFill>
                 <a:latin typeface="Calibri"/>
               </a:rPr>
-              <a:t>Sót u đồng tỉ trọng (cửa sổ CT rộng) → </a:t>
-            </a:r>
-            <a:r>
-              <a:rPr sz="1350" b="1" i="0">
+              <a:t>Mở rộng phạm vi:</a:t>
+            </a:r>
+            <a:r>
+              <a:rPr sz="1300" b="0" i="0">
                 <a:solidFill>
                   <a:srgbClr val="1C2736"/>
                 </a:solidFill>
                 <a:latin typeface="Calibri"/>
               </a:rPr>
-              <a:t>multi-window</a:t>
-            </a:r>
-            <a:r>
-              <a:rPr sz="1350" b="0" i="0">
+              <a:t> huấn luyện thêm các task y khoa khác (đa cơ quan, nhiều loại bệnh); tiến tới </a:t>
+            </a:r>
+            <a:r>
+              <a:rPr sz="1300" b="1" i="0">
                 <a:solidFill>
                   <a:srgbClr val="1C2736"/>
                 </a:solidFill>
                 <a:latin typeface="Calibri"/>
               </a:rPr>
-              <a:t> (cửa sổ gan hẹp) + </a:t>
-            </a:r>
-            <a:r>
-              <a:rPr sz="1350" b="1" i="0">
+              <a:t>báo cáo có dẫn chứng</a:t>
+            </a:r>
+            <a:r>
+              <a:rPr sz="1300" b="0" i="0">
                 <a:solidFill>
                   <a:srgbClr val="1C2736"/>
                 </a:solidFill>
                 <a:latin typeface="Calibri"/>
               </a:rPr>
-              <a:t>2.5D</a:t>
-            </a:r>
-            <a:r>
-              <a:rPr sz="1350" b="0" i="0">
-                <a:solidFill>
-                  <a:srgbClr val="1C2736"/>
-                </a:solidFill>
-                <a:latin typeface="Calibri"/>
-              </a:rPr>
-              <a:t> đưa lại ngữ cảnh 3D.</a:t>
+              <a:t> (grounded report).</a:t>
             </a:r>
           </a:p>
           <a:p>
@@ -6163,11 +6154,11 @@
                 <a:spcPts val="0"/>
               </a:spcBef>
               <a:spcAft>
-                <a:spcPts val="1200"/>
+                <a:spcPts val="1100"/>
               </a:spcAft>
             </a:pPr>
             <a:r>
-              <a:rPr sz="1350" b="1" i="0">
+              <a:rPr sz="1300" b="1" i="0">
                 <a:solidFill>
                   <a:srgbClr val="1A3A5C"/>
                 </a:solidFill>
@@ -6176,49 +6167,58 @@
               <a:t>▪  </a:t>
             </a:r>
             <a:r>
-              <a:rPr sz="1350" b="0" i="0">
+              <a:rPr sz="1300" b="1" i="0">
                 <a:solidFill>
                   <a:srgbClr val="1C2736"/>
                 </a:solidFill>
                 <a:latin typeface="Calibri"/>
               </a:rPr>
-              <a:t>Định vị còn thô (pIoU 0.27) → segmenter chuyên (</a:t>
-            </a:r>
-            <a:r>
-              <a:rPr sz="1350" b="1" i="0">
+              <a:t>Đưa lại thông tin 3D:</a:t>
+            </a:r>
+            <a:r>
+              <a:rPr sz="1300" b="0" i="0">
                 <a:solidFill>
                   <a:srgbClr val="1C2736"/>
                 </a:solidFill>
                 <a:latin typeface="Calibri"/>
               </a:rPr>
-              <a:t>MedSAM</a:t>
-            </a:r>
-            <a:r>
-              <a:rPr sz="1350" b="0" i="0">
+              <a:t> ép ảnh 3D→2D làm mất ngữ cảnh, khó tách u với mạch máu (khác cách bác sĩ đọc) → </a:t>
+            </a:r>
+            <a:r>
+              <a:rPr sz="1300" b="1" i="0">
                 <a:solidFill>
                   <a:srgbClr val="1C2736"/>
                 </a:solidFill>
                 <a:latin typeface="Calibri"/>
               </a:rPr>
-              <a:t>) hoặc </a:t>
-            </a:r>
-            <a:r>
-              <a:rPr sz="1350" b="1" i="0">
+              <a:t>gán nhiều lát liên tiếp (2.5D)</a:t>
+            </a:r>
+            <a:r>
+              <a:rPr sz="1300" b="0" i="0">
                 <a:solidFill>
                   <a:srgbClr val="1C2736"/>
                 </a:solidFill>
                 <a:latin typeface="Calibri"/>
               </a:rPr>
-              <a:t>polygon</a:t>
-            </a:r>
-            <a:r>
-              <a:rPr sz="1350" b="0" i="0">
+              <a:t>; xa hơn: </a:t>
+            </a:r>
+            <a:r>
+              <a:rPr sz="1300" b="1" i="0">
                 <a:solidFill>
                   <a:srgbClr val="1C2736"/>
                 </a:solidFill>
                 <a:latin typeface="Calibri"/>
               </a:rPr>
-              <a:t> để khoanh khít hơn.</a:t>
+              <a:t>CT đa pha</a:t>
+            </a:r>
+            <a:r>
+              <a:rPr sz="1300" b="0" i="0">
+                <a:solidFill>
+                  <a:srgbClr val="1C2736"/>
+                </a:solidFill>
+                <a:latin typeface="Calibri"/>
+              </a:rPr>
+              <a:t> phân biệt u/mạch bằng kiểu ngấm thuốc.</a:t>
             </a:r>
           </a:p>
           <a:p>
@@ -6227,11 +6227,11 @@
                 <a:spcPts val="0"/>
               </a:spcBef>
               <a:spcAft>
-                <a:spcPts val="1200"/>
+                <a:spcPts val="1100"/>
               </a:spcAft>
             </a:pPr>
             <a:r>
-              <a:rPr sz="1350" b="1" i="0">
+              <a:rPr sz="1300" b="1" i="0">
                 <a:solidFill>
                   <a:srgbClr val="1A3A5C"/>
                 </a:solidFill>
@@ -6240,49 +6240,22 @@
               <a:t>▪  </a:t>
             </a:r>
             <a:r>
-              <a:rPr sz="1350" b="0" i="0">
+              <a:rPr sz="1300" b="1" i="0">
                 <a:solidFill>
                   <a:srgbClr val="1C2736"/>
                 </a:solidFill>
                 <a:latin typeface="Calibri"/>
               </a:rPr>
-              <a:t>Mẫu nhỏ, một bộ dữ liệu → </a:t>
-            </a:r>
-            <a:r>
-              <a:rPr sz="1350" b="1" i="0">
+              <a:t>Bổ sung tri thức y khoa tiếng Việt:</a:t>
+            </a:r>
+            <a:r>
+              <a:rPr sz="1300" b="0" i="0">
                 <a:solidFill>
                   <a:srgbClr val="1C2736"/>
                 </a:solidFill>
                 <a:latin typeface="Calibri"/>
               </a:rPr>
-              <a:t>external validation</a:t>
-            </a:r>
-            <a:r>
-              <a:rPr sz="1350" b="0" i="0">
-                <a:solidFill>
-                  <a:srgbClr val="1C2736"/>
-                </a:solidFill>
-                <a:latin typeface="Calibri"/>
-              </a:rPr>
-              <a:t> (bộ khác) + </a:t>
-            </a:r>
-            <a:r>
-              <a:rPr sz="1350" b="1" i="0">
-                <a:solidFill>
-                  <a:srgbClr val="1C2736"/>
-                </a:solidFill>
-                <a:latin typeface="Calibri"/>
-              </a:rPr>
-              <a:t>calibration</a:t>
-            </a:r>
-            <a:r>
-              <a:rPr sz="1350" b="0" i="0">
-                <a:solidFill>
-                  <a:srgbClr val="1C2736"/>
-                </a:solidFill>
-                <a:latin typeface="Calibri"/>
-              </a:rPr>
-              <a:t> tăng độ tin cậy.</a:t>
+              <a:t> huấn luyện thêm dữ liệu tiếng Việt vì chuyên ngành nhiều thuật ngữ ngách → trả lời đúng ngữ cảnh Việt.</a:t>
             </a:r>
           </a:p>
           <a:p>
@@ -6291,11 +6264,11 @@
                 <a:spcPts val="0"/>
               </a:spcBef>
               <a:spcAft>
-                <a:spcPts val="1200"/>
+                <a:spcPts val="1100"/>
               </a:spcAft>
             </a:pPr>
             <a:r>
-              <a:rPr sz="1350" b="1" i="0">
+              <a:rPr sz="1300" b="1" i="0">
                 <a:solidFill>
                   <a:srgbClr val="1A3A5C"/>
                 </a:solidFill>
@@ -6304,43 +6277,52 @@
               <a:t>▪  </a:t>
             </a:r>
             <a:r>
-              <a:rPr sz="1350" b="0" i="0">
+              <a:rPr sz="1300" b="1" i="0">
                 <a:solidFill>
                   <a:srgbClr val="1C2736"/>
                 </a:solidFill>
                 <a:latin typeface="Calibri"/>
               </a:rPr>
-              <a:t>Mới ở mức phát hiện → </a:t>
-            </a:r>
-            <a:r>
-              <a:rPr sz="1350" b="1" i="0">
+              <a:t>Tăng dữ liệu huấn luyện:</a:t>
+            </a:r>
+            <a:r>
+              <a:rPr sz="1300" b="0" i="0">
                 <a:solidFill>
                   <a:srgbClr val="1C2736"/>
                 </a:solidFill>
                 <a:latin typeface="Calibri"/>
               </a:rPr>
-              <a:t>grounded report</a:t>
-            </a:r>
-            <a:r>
-              <a:rPr sz="1350" b="0" i="0">
+              <a:t> dữ liệu hiện còn ít nên n khi đánh giá chưa đủ lớn để tin cậy → thêm dữ liệu + </a:t>
+            </a:r>
+            <a:r>
+              <a:rPr sz="1300" b="1" i="0">
                 <a:solidFill>
                   <a:srgbClr val="1C2736"/>
                 </a:solidFill>
                 <a:latin typeface="Calibri"/>
               </a:rPr>
-              <a:t> (báo cáo có dẫn chứng) và mở rộng </a:t>
-            </a:r>
-            <a:r>
-              <a:rPr sz="1350" b="1" i="0">
+              <a:t>external validation</a:t>
+            </a:r>
+            <a:r>
+              <a:rPr sz="1300" b="0" i="0">
                 <a:solidFill>
                   <a:srgbClr val="1C2736"/>
                 </a:solidFill>
                 <a:latin typeface="Calibri"/>
               </a:rPr>
-              <a:t>đa cơ quan</a:t>
-            </a:r>
-            <a:r>
-              <a:rPr sz="1350" b="0" i="0">
+              <a:t> + </a:t>
+            </a:r>
+            <a:r>
+              <a:rPr sz="1300" b="1" i="0">
+                <a:solidFill>
+                  <a:srgbClr val="1C2736"/>
+                </a:solidFill>
+                <a:latin typeface="Calibri"/>
+              </a:rPr>
+              <a:t>calibration</a:t>
+            </a:r>
+            <a:r>
+              <a:rPr sz="1300" b="0" i="0">
                 <a:solidFill>
                   <a:srgbClr val="1C2736"/>
                 </a:solidFill>

--- a/seminar/cai_tien/slides_5min_VN.pptx
+++ b/seminar/cai_tien/slides_5min_VN.pptx
@@ -6341,8 +6341,8 @@
         </p:nvSpPr>
         <p:spPr>
           <a:xfrm>
-            <a:off x="365760" y="4114800"/>
-            <a:ext cx="8412480" cy="548640"/>
+            <a:off x="365760" y="4069080"/>
+            <a:ext cx="8412480" cy="713232"/>
           </a:xfrm>
           <a:prstGeom prst="rect">
             <a:avLst/>
@@ -6385,8 +6385,8 @@
         </p:nvSpPr>
         <p:spPr>
           <a:xfrm>
-            <a:off x="475488" y="4178808"/>
-            <a:ext cx="8193023" cy="420623"/>
+            <a:off x="475488" y="4133088"/>
+            <a:ext cx="8193023" cy="585216"/>
           </a:xfrm>
           <a:prstGeom prst="rect">
             <a:avLst/>
@@ -6422,7 +6422,7 @@
                 </a:solidFill>
                 <a:latin typeface="Calibri"/>
               </a:rPr>
-              <a:t>Không hứa đã tới đích — công trình chỉ ra con đường và những chỗ còn dốc.</a:t>
+              <a:t>Nghiên cứu chứng minh tính khả thi của hướng region-centric ở quy mô nhỏ (proof-of-concept); các hướng phát triển trên nhằm khắc phục hạn chế hiện tại và tiến tới ứng dụng thực tế.</a:t>
             </a:r>
           </a:p>
         </p:txBody>

--- a/seminar/cai_tien/slides_5min_VN.pptx
+++ b/seminar/cai_tien/slides_5min_VN.pptx
@@ -5693,7 +5693,7 @@
         <p:spPr>
           <a:xfrm>
             <a:off x="5394960" y="1828800"/>
-            <a:ext cx="3611880" cy="2165277"/>
+            <a:ext cx="3611880" cy="2194676"/>
           </a:xfrm>
           <a:prstGeom prst="rect">
             <a:avLst/>
@@ -5708,7 +5708,7 @@
         </p:nvSpPr>
         <p:spPr>
           <a:xfrm>
-            <a:off x="5394960" y="4021509"/>
+            <a:off x="5394960" y="4050908"/>
             <a:ext cx="3611880" cy="274320"/>
           </a:xfrm>
           <a:prstGeom prst="rect">

--- a/seminar/cai_tien/slides_5min_VN.pptx
+++ b/seminar/cai_tien/slides_5min_VN.pptx
@@ -5123,8 +5123,8 @@
         </p:nvSpPr>
         <p:spPr>
           <a:xfrm>
-            <a:off x="365760" y="4178808"/>
-            <a:ext cx="8412480" cy="548640"/>
+            <a:off x="365760" y="4087368"/>
+            <a:ext cx="8412480" cy="658368"/>
           </a:xfrm>
           <a:prstGeom prst="rect">
             <a:avLst/>
@@ -5167,8 +5167,8 @@
         </p:nvSpPr>
         <p:spPr>
           <a:xfrm>
-            <a:off x="475488" y="4242816"/>
-            <a:ext cx="8193023" cy="420623"/>
+            <a:off x="475488" y="4151376"/>
+            <a:ext cx="8193023" cy="530352"/>
           </a:xfrm>
           <a:prstGeom prst="rect">
             <a:avLst/>
@@ -5204,7 +5204,7 @@
                 </a:solidFill>
                 <a:latin typeface="Calibri"/>
               </a:rPr>
-              <a:t>n nhỏ (~25 bn dương / 2 âm) → CI rộng; đây là PoC, không tuyên bố lâm sàng.</a:t>
+              <a:t>Cỡ mẫu còn nhỏ — khoảng 25 bệnh nhân có u và 2 không u — nên các con số còn dao động; đây là nghiên cứu bước đầu (proof-of-concept), chưa phải hệ thống lâm sàng.</a:t>
             </a:r>
           </a:p>
         </p:txBody>
